--- a/docs/usage_deck/final/机台log分析使用说明.pptx
+++ b/docs/usage_deck/final/机台log分析使用说明.pptx
@@ -5149,6 +5149,46 @@
           </a:p>
         </p:txBody>
       </p:sp>
+      <p:sp>
+        <p:nvSpPr>
+          <p:cNvPr id="7" name="TextBox 6"/>
+          <p:cNvSpPr txBox="1"/>
+          <p:nvPr/>
+        </p:nvSpPr>
+        <p:spPr>
+          <a:xfrm>
+            <a:off x="10378440" y="6446520"/>
+            <a:ext cx="658368" cy="274320"/>
+          </a:xfrm>
+          <a:prstGeom prst="rect">
+            <a:avLst/>
+          </a:prstGeom>
+          <a:noFill/>
+        </p:spPr>
+        <p:txBody>
+          <a:bodyPr wrap="square" anchor="t" lIns="0" rIns="0" tIns="0" bIns="0">
+            <a:spAutoFit/>
+          </a:bodyPr>
+          <a:lstStyle/>
+          <a:p>
+            <a:pPr algn="r">
+              <a:lnSpc>
+                <a:spcPct val="100000"/>
+              </a:lnSpc>
+            </a:pPr>
+            <a:r>
+              <a:rPr sz="1000" b="0">
+                <a:solidFill>
+                  <a:srgbClr val="083C63"/>
+                </a:solidFill>
+                <a:latin typeface="Times New Roman"/>
+                <a:ea typeface="宋体"/>
+              </a:rPr>
+              <a:t>1 / 13</a:t>
+            </a:r>
+          </a:p>
+        </p:txBody>
+      </p:sp>
     </p:spTree>
   </p:cSld>
   <p:clrMapOvr>
@@ -5476,6 +5516,46 @@
                 <a:ea typeface="宋体"/>
               </a:rPr>
               <a:t>按关键词命中计数，按机台 / 模组汇总；EReason 清单映射中文原因名称。</a:t>
+            </a:r>
+          </a:p>
+        </p:txBody>
+      </p:sp>
+      <p:sp>
+        <p:nvSpPr>
+          <p:cNvPr id="8" name="TextBox 7"/>
+          <p:cNvSpPr txBox="1"/>
+          <p:nvPr/>
+        </p:nvSpPr>
+        <p:spPr>
+          <a:xfrm>
+            <a:off x="10378440" y="6446520"/>
+            <a:ext cx="658368" cy="274320"/>
+          </a:xfrm>
+          <a:prstGeom prst="rect">
+            <a:avLst/>
+          </a:prstGeom>
+          <a:noFill/>
+        </p:spPr>
+        <p:txBody>
+          <a:bodyPr wrap="square" anchor="t" lIns="0" rIns="0" tIns="0" bIns="0">
+            <a:spAutoFit/>
+          </a:bodyPr>
+          <a:lstStyle/>
+          <a:p>
+            <a:pPr algn="r">
+              <a:lnSpc>
+                <a:spcPct val="100000"/>
+              </a:lnSpc>
+            </a:pPr>
+            <a:r>
+              <a:rPr sz="1000" b="0">
+                <a:solidFill>
+                  <a:srgbClr val="083C63"/>
+                </a:solidFill>
+                <a:latin typeface="Times New Roman"/>
+                <a:ea typeface="宋体"/>
+              </a:rPr>
+              <a:t>10 / 13</a:t>
             </a:r>
           </a:p>
         </p:txBody>
@@ -5672,7 +5752,11 @@
                       </a:r>
                     </a:p>
                   </a:txBody>
-                  <a:tcPr anchor="ctr"/>
+                  <a:tcPr anchor="ctr">
+                    <a:solidFill>
+                      <a:srgbClr val="FFFFFF"/>
+                    </a:solidFill>
+                  </a:tcPr>
                 </a:tc>
                 <a:tc>
                   <a:txBody>
@@ -5696,7 +5780,11 @@
                       </a:r>
                     </a:p>
                   </a:txBody>
-                  <a:tcPr anchor="ctr"/>
+                  <a:tcPr anchor="ctr">
+                    <a:solidFill>
+                      <a:srgbClr val="FFFFFF"/>
+                    </a:solidFill>
+                  </a:tcPr>
                 </a:tc>
               </a:tr>
               <a:tr h="418011">
@@ -5780,7 +5868,11 @@
                       </a:r>
                     </a:p>
                   </a:txBody>
-                  <a:tcPr anchor="ctr"/>
+                  <a:tcPr anchor="ctr">
+                    <a:solidFill>
+                      <a:srgbClr val="FFFFFF"/>
+                    </a:solidFill>
+                  </a:tcPr>
                 </a:tc>
                 <a:tc>
                   <a:txBody>
@@ -5804,7 +5896,11 @@
                       </a:r>
                     </a:p>
                   </a:txBody>
-                  <a:tcPr anchor="ctr"/>
+                  <a:tcPr anchor="ctr">
+                    <a:solidFill>
+                      <a:srgbClr val="FFFFFF"/>
+                    </a:solidFill>
+                  </a:tcPr>
                 </a:tc>
               </a:tr>
               <a:tr h="418011">
@@ -5888,7 +5984,11 @@
                       </a:r>
                     </a:p>
                   </a:txBody>
-                  <a:tcPr anchor="ctr"/>
+                  <a:tcPr anchor="ctr">
+                    <a:solidFill>
+                      <a:srgbClr val="FFFFFF"/>
+                    </a:solidFill>
+                  </a:tcPr>
                 </a:tc>
                 <a:tc>
                   <a:txBody>
@@ -5912,7 +6012,11 @@
                       </a:r>
                     </a:p>
                   </a:txBody>
-                  <a:tcPr anchor="ctr"/>
+                  <a:tcPr anchor="ctr">
+                    <a:solidFill>
+                      <a:srgbClr val="FFFFFF"/>
+                    </a:solidFill>
+                  </a:tcPr>
                 </a:tc>
               </a:tr>
               <a:tr h="418014">
@@ -6017,6 +6121,46 @@
           </a:p>
         </p:txBody>
       </p:sp>
+      <p:sp>
+        <p:nvSpPr>
+          <p:cNvPr id="7" name="TextBox 6"/>
+          <p:cNvSpPr txBox="1"/>
+          <p:nvPr/>
+        </p:nvSpPr>
+        <p:spPr>
+          <a:xfrm>
+            <a:off x="10378440" y="6446520"/>
+            <a:ext cx="658368" cy="274320"/>
+          </a:xfrm>
+          <a:prstGeom prst="rect">
+            <a:avLst/>
+          </a:prstGeom>
+          <a:noFill/>
+        </p:spPr>
+        <p:txBody>
+          <a:bodyPr wrap="square" anchor="t" lIns="0" rIns="0" tIns="0" bIns="0">
+            <a:spAutoFit/>
+          </a:bodyPr>
+          <a:lstStyle/>
+          <a:p>
+            <a:pPr algn="r">
+              <a:lnSpc>
+                <a:spcPct val="100000"/>
+              </a:lnSpc>
+            </a:pPr>
+            <a:r>
+              <a:rPr sz="1000" b="0">
+                <a:solidFill>
+                  <a:srgbClr val="083C63"/>
+                </a:solidFill>
+                <a:latin typeface="Times New Roman"/>
+                <a:ea typeface="宋体"/>
+              </a:rPr>
+              <a:t>11 / 13</a:t>
+            </a:r>
+          </a:p>
+        </p:txBody>
+      </p:sp>
     </p:spTree>
   </p:cSld>
   <p:clrMapOvr>
@@ -6426,6 +6570,46 @@
           </a:p>
         </p:txBody>
       </p:sp>
+      <p:sp>
+        <p:nvSpPr>
+          <p:cNvPr id="9" name="TextBox 8"/>
+          <p:cNvSpPr txBox="1"/>
+          <p:nvPr/>
+        </p:nvSpPr>
+        <p:spPr>
+          <a:xfrm>
+            <a:off x="10378440" y="6446520"/>
+            <a:ext cx="658368" cy="274320"/>
+          </a:xfrm>
+          <a:prstGeom prst="rect">
+            <a:avLst/>
+          </a:prstGeom>
+          <a:noFill/>
+        </p:spPr>
+        <p:txBody>
+          <a:bodyPr wrap="square" anchor="t" lIns="0" rIns="0" tIns="0" bIns="0">
+            <a:spAutoFit/>
+          </a:bodyPr>
+          <a:lstStyle/>
+          <a:p>
+            <a:pPr algn="r">
+              <a:lnSpc>
+                <a:spcPct val="100000"/>
+              </a:lnSpc>
+            </a:pPr>
+            <a:r>
+              <a:rPr sz="1000" b="0">
+                <a:solidFill>
+                  <a:srgbClr val="083C63"/>
+                </a:solidFill>
+                <a:latin typeface="Times New Roman"/>
+                <a:ea typeface="宋体"/>
+              </a:rPr>
+              <a:t>12 / 13</a:t>
+            </a:r>
+          </a:p>
+        </p:txBody>
+      </p:sp>
     </p:spTree>
   </p:cSld>
   <p:clrMapOvr>
@@ -6639,6 +6823,46 @@
           </a:p>
         </p:txBody>
       </p:sp>
+      <p:sp>
+        <p:nvSpPr>
+          <p:cNvPr id="7" name="TextBox 6"/>
+          <p:cNvSpPr txBox="1"/>
+          <p:nvPr/>
+        </p:nvSpPr>
+        <p:spPr>
+          <a:xfrm>
+            <a:off x="10378440" y="6446520"/>
+            <a:ext cx="658368" cy="274320"/>
+          </a:xfrm>
+          <a:prstGeom prst="rect">
+            <a:avLst/>
+          </a:prstGeom>
+          <a:noFill/>
+        </p:spPr>
+        <p:txBody>
+          <a:bodyPr wrap="square" anchor="t" lIns="0" rIns="0" tIns="0" bIns="0">
+            <a:spAutoFit/>
+          </a:bodyPr>
+          <a:lstStyle/>
+          <a:p>
+            <a:pPr algn="r">
+              <a:lnSpc>
+                <a:spcPct val="100000"/>
+              </a:lnSpc>
+            </a:pPr>
+            <a:r>
+              <a:rPr sz="1000" b="0">
+                <a:solidFill>
+                  <a:srgbClr val="083C63"/>
+                </a:solidFill>
+                <a:latin typeface="Times New Roman"/>
+                <a:ea typeface="宋体"/>
+              </a:rPr>
+              <a:t>13 / 13</a:t>
+            </a:r>
+          </a:p>
+        </p:txBody>
+      </p:sp>
     </p:spTree>
   </p:cSld>
   <p:clrMapOvr>
@@ -6762,6 +6986,46 @@
           </a:p>
         </p:txBody>
       </p:sp>
+      <p:sp>
+        <p:nvSpPr>
+          <p:cNvPr id="4" name="TextBox 3"/>
+          <p:cNvSpPr txBox="1"/>
+          <p:nvPr/>
+        </p:nvSpPr>
+        <p:spPr>
+          <a:xfrm>
+            <a:off x="10378440" y="6446520"/>
+            <a:ext cx="658368" cy="274320"/>
+          </a:xfrm>
+          <a:prstGeom prst="rect">
+            <a:avLst/>
+          </a:prstGeom>
+          <a:noFill/>
+        </p:spPr>
+        <p:txBody>
+          <a:bodyPr wrap="square" anchor="t" lIns="0" rIns="0" tIns="0" bIns="0">
+            <a:spAutoFit/>
+          </a:bodyPr>
+          <a:lstStyle/>
+          <a:p>
+            <a:pPr algn="r">
+              <a:lnSpc>
+                <a:spcPct val="100000"/>
+              </a:lnSpc>
+            </a:pPr>
+            <a:r>
+              <a:rPr sz="1000" b="0">
+                <a:solidFill>
+                  <a:srgbClr val="083C63"/>
+                </a:solidFill>
+                <a:latin typeface="Times New Roman"/>
+                <a:ea typeface="宋体"/>
+              </a:rPr>
+              <a:t>2 / 13</a:t>
+            </a:r>
+          </a:p>
+        </p:txBody>
+      </p:sp>
     </p:spTree>
   </p:cSld>
   <p:clrMapOvr>
@@ -7327,6 +7591,46 @@
           </a:p>
         </p:txBody>
       </p:sp>
+      <p:sp>
+        <p:nvSpPr>
+          <p:cNvPr id="11" name="TextBox 10"/>
+          <p:cNvSpPr txBox="1"/>
+          <p:nvPr/>
+        </p:nvSpPr>
+        <p:spPr>
+          <a:xfrm>
+            <a:off x="10378440" y="6446520"/>
+            <a:ext cx="658368" cy="274320"/>
+          </a:xfrm>
+          <a:prstGeom prst="rect">
+            <a:avLst/>
+          </a:prstGeom>
+          <a:noFill/>
+        </p:spPr>
+        <p:txBody>
+          <a:bodyPr wrap="square" anchor="t" lIns="0" rIns="0" tIns="0" bIns="0">
+            <a:spAutoFit/>
+          </a:bodyPr>
+          <a:lstStyle/>
+          <a:p>
+            <a:pPr algn="r">
+              <a:lnSpc>
+                <a:spcPct val="100000"/>
+              </a:lnSpc>
+            </a:pPr>
+            <a:r>
+              <a:rPr sz="1000" b="0">
+                <a:solidFill>
+                  <a:srgbClr val="083C63"/>
+                </a:solidFill>
+                <a:latin typeface="Times New Roman"/>
+                <a:ea typeface="宋体"/>
+              </a:rPr>
+              <a:t>3 / 13</a:t>
+            </a:r>
+          </a:p>
+        </p:txBody>
+      </p:sp>
     </p:spTree>
   </p:cSld>
   <p:clrMapOvr>
@@ -7892,6 +8196,46 @@
           </a:p>
         </p:txBody>
       </p:sp>
+      <p:sp>
+        <p:nvSpPr>
+          <p:cNvPr id="11" name="TextBox 10"/>
+          <p:cNvSpPr txBox="1"/>
+          <p:nvPr/>
+        </p:nvSpPr>
+        <p:spPr>
+          <a:xfrm>
+            <a:off x="10378440" y="6446520"/>
+            <a:ext cx="658368" cy="274320"/>
+          </a:xfrm>
+          <a:prstGeom prst="rect">
+            <a:avLst/>
+          </a:prstGeom>
+          <a:noFill/>
+        </p:spPr>
+        <p:txBody>
+          <a:bodyPr wrap="square" anchor="t" lIns="0" rIns="0" tIns="0" bIns="0">
+            <a:spAutoFit/>
+          </a:bodyPr>
+          <a:lstStyle/>
+          <a:p>
+            <a:pPr algn="r">
+              <a:lnSpc>
+                <a:spcPct val="100000"/>
+              </a:lnSpc>
+            </a:pPr>
+            <a:r>
+              <a:rPr sz="1000" b="0">
+                <a:solidFill>
+                  <a:srgbClr val="083C63"/>
+                </a:solidFill>
+                <a:latin typeface="Times New Roman"/>
+                <a:ea typeface="宋体"/>
+              </a:rPr>
+              <a:t>4 / 13</a:t>
+            </a:r>
+          </a:p>
+        </p:txBody>
+      </p:sp>
     </p:spTree>
   </p:cSld>
   <p:clrMapOvr>
@@ -8845,6 +9189,46 @@
           </a:p>
         </p:txBody>
       </p:sp>
+      <p:sp>
+        <p:nvSpPr>
+          <p:cNvPr id="24" name="TextBox 23"/>
+          <p:cNvSpPr txBox="1"/>
+          <p:nvPr/>
+        </p:nvSpPr>
+        <p:spPr>
+          <a:xfrm>
+            <a:off x="10378440" y="6446520"/>
+            <a:ext cx="658368" cy="274320"/>
+          </a:xfrm>
+          <a:prstGeom prst="rect">
+            <a:avLst/>
+          </a:prstGeom>
+          <a:noFill/>
+        </p:spPr>
+        <p:txBody>
+          <a:bodyPr wrap="square" anchor="t" lIns="0" rIns="0" tIns="0" bIns="0">
+            <a:spAutoFit/>
+          </a:bodyPr>
+          <a:lstStyle/>
+          <a:p>
+            <a:pPr algn="r">
+              <a:lnSpc>
+                <a:spcPct val="100000"/>
+              </a:lnSpc>
+            </a:pPr>
+            <a:r>
+              <a:rPr sz="1000" b="0">
+                <a:solidFill>
+                  <a:srgbClr val="083C63"/>
+                </a:solidFill>
+                <a:latin typeface="Times New Roman"/>
+                <a:ea typeface="宋体"/>
+              </a:rPr>
+              <a:t>5 / 13</a:t>
+            </a:r>
+          </a:p>
+        </p:txBody>
+      </p:sp>
     </p:spTree>
   </p:cSld>
   <p:clrMapOvr>
@@ -9554,6 +9938,46 @@
                 <a:ea typeface="宋体"/>
               </a:rPr>
               <a:t>分析结果表格与进度显示；顶部“使用说明”按钮可查看各制程说明与计算逻辑，右下角为版权信息。</a:t>
+            </a:r>
+          </a:p>
+        </p:txBody>
+      </p:sp>
+      <p:sp>
+        <p:nvSpPr>
+          <p:cNvPr id="19" name="TextBox 18"/>
+          <p:cNvSpPr txBox="1"/>
+          <p:nvPr/>
+        </p:nvSpPr>
+        <p:spPr>
+          <a:xfrm>
+            <a:off x="10378440" y="6446520"/>
+            <a:ext cx="658368" cy="274320"/>
+          </a:xfrm>
+          <a:prstGeom prst="rect">
+            <a:avLst/>
+          </a:prstGeom>
+          <a:noFill/>
+        </p:spPr>
+        <p:txBody>
+          <a:bodyPr wrap="square" anchor="t" lIns="0" rIns="0" tIns="0" bIns="0">
+            <a:spAutoFit/>
+          </a:bodyPr>
+          <a:lstStyle/>
+          <a:p>
+            <a:pPr algn="r">
+              <a:lnSpc>
+                <a:spcPct val="100000"/>
+              </a:lnSpc>
+            </a:pPr>
+            <a:r>
+              <a:rPr sz="1000" b="0">
+                <a:solidFill>
+                  <a:srgbClr val="083C63"/>
+                </a:solidFill>
+                <a:latin typeface="Times New Roman"/>
+                <a:ea typeface="宋体"/>
+              </a:rPr>
+              <a:t>6 / 13</a:t>
             </a:r>
           </a:p>
         </p:txBody>
@@ -9800,7 +10224,11 @@
                       </a:r>
                     </a:p>
                   </a:txBody>
-                  <a:tcPr anchor="ctr"/>
+                  <a:tcPr anchor="ctr">
+                    <a:solidFill>
+                      <a:srgbClr val="FFFFFF"/>
+                    </a:solidFill>
+                  </a:tcPr>
                 </a:tc>
                 <a:tc>
                   <a:txBody>
@@ -9824,7 +10252,11 @@
                       </a:r>
                     </a:p>
                   </a:txBody>
-                  <a:tcPr anchor="ctr"/>
+                  <a:tcPr anchor="ctr">
+                    <a:solidFill>
+                      <a:srgbClr val="FFFFFF"/>
+                    </a:solidFill>
+                  </a:tcPr>
                 </a:tc>
                 <a:tc>
                   <a:txBody>
@@ -9848,7 +10280,11 @@
                       </a:r>
                     </a:p>
                   </a:txBody>
-                  <a:tcPr anchor="ctr"/>
+                  <a:tcPr anchor="ctr">
+                    <a:solidFill>
+                      <a:srgbClr val="FFFFFF"/>
+                    </a:solidFill>
+                  </a:tcPr>
                 </a:tc>
                 <a:tc>
                   <a:txBody>
@@ -9872,7 +10308,11 @@
                       </a:r>
                     </a:p>
                   </a:txBody>
-                  <a:tcPr anchor="ctr"/>
+                  <a:tcPr anchor="ctr">
+                    <a:solidFill>
+                      <a:srgbClr val="FFFFFF"/>
+                    </a:solidFill>
+                  </a:tcPr>
                 </a:tc>
               </a:tr>
               <a:tr h="457200">
@@ -10012,7 +10452,11 @@
                       </a:r>
                     </a:p>
                   </a:txBody>
-                  <a:tcPr anchor="ctr"/>
+                  <a:tcPr anchor="ctr">
+                    <a:solidFill>
+                      <a:srgbClr val="FFFFFF"/>
+                    </a:solidFill>
+                  </a:tcPr>
                 </a:tc>
                 <a:tc>
                   <a:txBody>
@@ -10036,7 +10480,11 @@
                       </a:r>
                     </a:p>
                   </a:txBody>
-                  <a:tcPr anchor="ctr"/>
+                  <a:tcPr anchor="ctr">
+                    <a:solidFill>
+                      <a:srgbClr val="FFFFFF"/>
+                    </a:solidFill>
+                  </a:tcPr>
                 </a:tc>
                 <a:tc>
                   <a:txBody>
@@ -10060,7 +10508,11 @@
                       </a:r>
                     </a:p>
                   </a:txBody>
-                  <a:tcPr anchor="ctr"/>
+                  <a:tcPr anchor="ctr">
+                    <a:solidFill>
+                      <a:srgbClr val="FFFFFF"/>
+                    </a:solidFill>
+                  </a:tcPr>
                 </a:tc>
                 <a:tc>
                   <a:txBody>
@@ -10084,7 +10536,11 @@
                       </a:r>
                     </a:p>
                   </a:txBody>
-                  <a:tcPr anchor="ctr"/>
+                  <a:tcPr anchor="ctr">
+                    <a:solidFill>
+                      <a:srgbClr val="FFFFFF"/>
+                    </a:solidFill>
+                  </a:tcPr>
                 </a:tc>
               </a:tr>
               <a:tr h="457200">
@@ -10224,7 +10680,11 @@
                       </a:r>
                     </a:p>
                   </a:txBody>
-                  <a:tcPr anchor="ctr"/>
+                  <a:tcPr anchor="ctr">
+                    <a:solidFill>
+                      <a:srgbClr val="FFFFFF"/>
+                    </a:solidFill>
+                  </a:tcPr>
                 </a:tc>
                 <a:tc>
                   <a:txBody>
@@ -10248,7 +10708,11 @@
                       </a:r>
                     </a:p>
                   </a:txBody>
-                  <a:tcPr anchor="ctr"/>
+                  <a:tcPr anchor="ctr">
+                    <a:solidFill>
+                      <a:srgbClr val="FFFFFF"/>
+                    </a:solidFill>
+                  </a:tcPr>
                 </a:tc>
                 <a:tc>
                   <a:txBody>
@@ -10272,7 +10736,11 @@
                       </a:r>
                     </a:p>
                   </a:txBody>
-                  <a:tcPr anchor="ctr"/>
+                  <a:tcPr anchor="ctr">
+                    <a:solidFill>
+                      <a:srgbClr val="FFFFFF"/>
+                    </a:solidFill>
+                  </a:tcPr>
                 </a:tc>
                 <a:tc>
                   <a:txBody>
@@ -10296,7 +10764,11 @@
                       </a:r>
                     </a:p>
                   </a:txBody>
-                  <a:tcPr anchor="ctr"/>
+                  <a:tcPr anchor="ctr">
+                    <a:solidFill>
+                      <a:srgbClr val="FFFFFF"/>
+                    </a:solidFill>
+                  </a:tcPr>
                 </a:tc>
               </a:tr>
             </a:tbl>
@@ -10339,6 +10811,46 @@
                 <a:ea typeface="宋体"/>
               </a:rPr>
               <a:t>另有“通用（手动配置）”与“自定义”模板，不套用固定逻辑。</a:t>
+            </a:r>
+          </a:p>
+        </p:txBody>
+      </p:sp>
+      <p:sp>
+        <p:nvSpPr>
+          <p:cNvPr id="7" name="TextBox 6"/>
+          <p:cNvSpPr txBox="1"/>
+          <p:nvPr/>
+        </p:nvSpPr>
+        <p:spPr>
+          <a:xfrm>
+            <a:off x="10378440" y="6446520"/>
+            <a:ext cx="658368" cy="274320"/>
+          </a:xfrm>
+          <a:prstGeom prst="rect">
+            <a:avLst/>
+          </a:prstGeom>
+          <a:noFill/>
+        </p:spPr>
+        <p:txBody>
+          <a:bodyPr wrap="square" anchor="t" lIns="0" rIns="0" tIns="0" bIns="0">
+            <a:spAutoFit/>
+          </a:bodyPr>
+          <a:lstStyle/>
+          <a:p>
+            <a:pPr algn="r">
+              <a:lnSpc>
+                <a:spcPct val="100000"/>
+              </a:lnSpc>
+            </a:pPr>
+            <a:r>
+              <a:rPr sz="1000" b="0">
+                <a:solidFill>
+                  <a:srgbClr val="083C63"/>
+                </a:solidFill>
+                <a:latin typeface="Times New Roman"/>
+                <a:ea typeface="宋体"/>
+              </a:rPr>
+              <a:t>7 / 13</a:t>
             </a:r>
           </a:p>
         </p:txBody>
@@ -11051,6 +11563,46 @@
                 <a:ea typeface="宋体"/>
               </a:rPr>
               <a:t>周期分类：间隔 &gt; 计划性停机阈值 → 计划性停机；&gt; 正常周期阈值 → 异常周期；其余为正常周期。</a:t>
+            </a:r>
+          </a:p>
+        </p:txBody>
+      </p:sp>
+      <p:sp>
+        <p:nvSpPr>
+          <p:cNvPr id="21" name="TextBox 20"/>
+          <p:cNvSpPr txBox="1"/>
+          <p:nvPr/>
+        </p:nvSpPr>
+        <p:spPr>
+          <a:xfrm>
+            <a:off x="10378440" y="6446520"/>
+            <a:ext cx="658368" cy="274320"/>
+          </a:xfrm>
+          <a:prstGeom prst="rect">
+            <a:avLst/>
+          </a:prstGeom>
+          <a:noFill/>
+        </p:spPr>
+        <p:txBody>
+          <a:bodyPr wrap="square" anchor="t" lIns="0" rIns="0" tIns="0" bIns="0">
+            <a:spAutoFit/>
+          </a:bodyPr>
+          <a:lstStyle/>
+          <a:p>
+            <a:pPr algn="r">
+              <a:lnSpc>
+                <a:spcPct val="100000"/>
+              </a:lnSpc>
+            </a:pPr>
+            <a:r>
+              <a:rPr sz="1000" b="0">
+                <a:solidFill>
+                  <a:srgbClr val="083C63"/>
+                </a:solidFill>
+                <a:latin typeface="Times New Roman"/>
+                <a:ea typeface="宋体"/>
+              </a:rPr>
+              <a:t>8 / 13</a:t>
             </a:r>
           </a:p>
         </p:txBody>
@@ -11417,6 +11969,46 @@
                 <a:ea typeface="宋体"/>
               </a:rPr>
               <a:t>甘特示例：来自工具对 LM 示例日志的分析输出（示意）</a:t>
+            </a:r>
+          </a:p>
+        </p:txBody>
+      </p:sp>
+      <p:sp>
+        <p:nvSpPr>
+          <p:cNvPr id="9" name="TextBox 8"/>
+          <p:cNvSpPr txBox="1"/>
+          <p:nvPr/>
+        </p:nvSpPr>
+        <p:spPr>
+          <a:xfrm>
+            <a:off x="10378440" y="6446520"/>
+            <a:ext cx="658368" cy="274320"/>
+          </a:xfrm>
+          <a:prstGeom prst="rect">
+            <a:avLst/>
+          </a:prstGeom>
+          <a:noFill/>
+        </p:spPr>
+        <p:txBody>
+          <a:bodyPr wrap="square" anchor="t" lIns="0" rIns="0" tIns="0" bIns="0">
+            <a:spAutoFit/>
+          </a:bodyPr>
+          <a:lstStyle/>
+          <a:p>
+            <a:pPr algn="r">
+              <a:lnSpc>
+                <a:spcPct val="100000"/>
+              </a:lnSpc>
+            </a:pPr>
+            <a:r>
+              <a:rPr sz="1000" b="0">
+                <a:solidFill>
+                  <a:srgbClr val="083C63"/>
+                </a:solidFill>
+                <a:latin typeface="Times New Roman"/>
+                <a:ea typeface="宋体"/>
+              </a:rPr>
+              <a:t>9 / 13</a:t>
             </a:r>
           </a:p>
         </p:txBody>

--- a/docs/usage_deck/final/机台log分析使用说明.pptx
+++ b/docs/usage_deck/final/机台log分析使用说明.pptx
@@ -5177,7 +5177,7 @@
               </a:lnSpc>
             </a:pPr>
             <a:r>
-              <a:rPr sz="1000" b="0">
+              <a:rPr sz="900" b="0">
                 <a:solidFill>
                   <a:srgbClr val="083C63"/>
                 </a:solidFill>
@@ -5301,7 +5301,7 @@
             <a:avLst/>
           </a:prstGeom>
           <a:solidFill>
-            <a:srgbClr val="F2F5F8"/>
+            <a:srgbClr val="083C63"/>
           </a:solidFill>
           <a:ln>
             <a:noFill/>
@@ -5334,7 +5334,7 @@
             <a:r>
               <a:rPr sz="1400" b="1">
                 <a:solidFill>
-                  <a:srgbClr val="083C63"/>
+                  <a:srgbClr val="FFFFFF"/>
                 </a:solidFill>
                 <a:latin typeface="Times New Roman"/>
                 <a:ea typeface="宋体"/>
@@ -5354,7 +5354,7 @@
             <a:r>
               <a:rPr sz="1200" b="0">
                 <a:solidFill>
-                  <a:srgbClr val="595959"/>
+                  <a:srgbClr val="DDE6EF"/>
                 </a:solidFill>
                 <a:latin typeface="Times New Roman"/>
                 <a:ea typeface="宋体"/>
@@ -5379,7 +5379,7 @@
             <a:avLst/>
           </a:prstGeom>
           <a:solidFill>
-            <a:srgbClr val="F2F5F8"/>
+            <a:srgbClr val="083C63"/>
           </a:solidFill>
           <a:ln>
             <a:noFill/>
@@ -5412,7 +5412,7 @@
             <a:r>
               <a:rPr sz="1400" b="1">
                 <a:solidFill>
-                  <a:srgbClr val="083C63"/>
+                  <a:srgbClr val="FFFFFF"/>
                 </a:solidFill>
                 <a:latin typeface="Times New Roman"/>
                 <a:ea typeface="宋体"/>
@@ -5432,7 +5432,7 @@
             <a:r>
               <a:rPr sz="1200" b="0">
                 <a:solidFill>
-                  <a:srgbClr val="595959"/>
+                  <a:srgbClr val="DDE6EF"/>
                 </a:solidFill>
                 <a:latin typeface="Times New Roman"/>
                 <a:ea typeface="宋体"/>
@@ -5457,7 +5457,7 @@
             <a:avLst/>
           </a:prstGeom>
           <a:solidFill>
-            <a:srgbClr val="F2F5F8"/>
+            <a:srgbClr val="083C63"/>
           </a:solidFill>
           <a:ln>
             <a:noFill/>
@@ -5490,7 +5490,7 @@
             <a:r>
               <a:rPr sz="1400" b="1">
                 <a:solidFill>
-                  <a:srgbClr val="083C63"/>
+                  <a:srgbClr val="FFFFFF"/>
                 </a:solidFill>
                 <a:latin typeface="Times New Roman"/>
                 <a:ea typeface="宋体"/>
@@ -5510,7 +5510,7 @@
             <a:r>
               <a:rPr sz="1200" b="0">
                 <a:solidFill>
-                  <a:srgbClr val="595959"/>
+                  <a:srgbClr val="DDE6EF"/>
                 </a:solidFill>
                 <a:latin typeface="Times New Roman"/>
                 <a:ea typeface="宋体"/>
@@ -5548,7 +5548,7 @@
               </a:lnSpc>
             </a:pPr>
             <a:r>
-              <a:rPr sz="1000" b="0">
+              <a:rPr sz="900" b="0">
                 <a:solidFill>
                   <a:srgbClr val="083C63"/>
                 </a:solidFill>
@@ -6149,7 +6149,7 @@
               </a:lnSpc>
             </a:pPr>
             <a:r>
-              <a:rPr sz="1000" b="0">
+              <a:rPr sz="900" b="0">
                 <a:solidFill>
                   <a:srgbClr val="083C63"/>
                 </a:solidFill>
@@ -6273,7 +6273,7 @@
             <a:avLst/>
           </a:prstGeom>
           <a:solidFill>
-            <a:srgbClr val="F2F5F8"/>
+            <a:srgbClr val="083C63"/>
           </a:solidFill>
           <a:ln>
             <a:noFill/>
@@ -6306,7 +6306,7 @@
             <a:r>
               <a:rPr sz="1400" b="1">
                 <a:solidFill>
-                  <a:srgbClr val="083C63"/>
+                  <a:srgbClr val="FFFFFF"/>
                 </a:solidFill>
                 <a:latin typeface="Times New Roman"/>
                 <a:ea typeface="宋体"/>
@@ -6326,7 +6326,7 @@
             <a:r>
               <a:rPr sz="1200" b="0">
                 <a:solidFill>
-                  <a:srgbClr val="595959"/>
+                  <a:srgbClr val="DDE6EF"/>
                 </a:solidFill>
                 <a:latin typeface="Times New Roman"/>
                 <a:ea typeface="宋体"/>
@@ -6351,7 +6351,7 @@
             <a:avLst/>
           </a:prstGeom>
           <a:solidFill>
-            <a:srgbClr val="F2F5F8"/>
+            <a:srgbClr val="083C63"/>
           </a:solidFill>
           <a:ln>
             <a:noFill/>
@@ -6384,7 +6384,7 @@
             <a:r>
               <a:rPr sz="1400" b="1">
                 <a:solidFill>
-                  <a:srgbClr val="083C63"/>
+                  <a:srgbClr val="FFFFFF"/>
                 </a:solidFill>
                 <a:latin typeface="Times New Roman"/>
                 <a:ea typeface="宋体"/>
@@ -6404,7 +6404,7 @@
             <a:r>
               <a:rPr sz="1200" b="0">
                 <a:solidFill>
-                  <a:srgbClr val="595959"/>
+                  <a:srgbClr val="DDE6EF"/>
                 </a:solidFill>
                 <a:latin typeface="Times New Roman"/>
                 <a:ea typeface="宋体"/>
@@ -6429,7 +6429,7 @@
             <a:avLst/>
           </a:prstGeom>
           <a:solidFill>
-            <a:srgbClr val="F2F5F8"/>
+            <a:srgbClr val="083C63"/>
           </a:solidFill>
           <a:ln>
             <a:noFill/>
@@ -6462,7 +6462,7 @@
             <a:r>
               <a:rPr sz="1400" b="1">
                 <a:solidFill>
-                  <a:srgbClr val="083C63"/>
+                  <a:srgbClr val="FFFFFF"/>
                 </a:solidFill>
                 <a:latin typeface="Times New Roman"/>
                 <a:ea typeface="宋体"/>
@@ -6482,7 +6482,7 @@
             <a:r>
               <a:rPr sz="1200" b="0">
                 <a:solidFill>
-                  <a:srgbClr val="595959"/>
+                  <a:srgbClr val="DDE6EF"/>
                 </a:solidFill>
                 <a:latin typeface="Times New Roman"/>
                 <a:ea typeface="宋体"/>
@@ -6507,7 +6507,7 @@
             <a:avLst/>
           </a:prstGeom>
           <a:solidFill>
-            <a:srgbClr val="F2F5F8"/>
+            <a:srgbClr val="083C63"/>
           </a:solidFill>
           <a:ln>
             <a:noFill/>
@@ -6540,7 +6540,7 @@
             <a:r>
               <a:rPr sz="1400" b="1">
                 <a:solidFill>
-                  <a:srgbClr val="083C63"/>
+                  <a:srgbClr val="FFFFFF"/>
                 </a:solidFill>
                 <a:latin typeface="Times New Roman"/>
                 <a:ea typeface="宋体"/>
@@ -6560,7 +6560,7 @@
             <a:r>
               <a:rPr sz="1200" b="0">
                 <a:solidFill>
-                  <a:srgbClr val="595959"/>
+                  <a:srgbClr val="DDE6EF"/>
                 </a:solidFill>
                 <a:latin typeface="Times New Roman"/>
                 <a:ea typeface="宋体"/>
@@ -6598,7 +6598,7 @@
               </a:lnSpc>
             </a:pPr>
             <a:r>
-              <a:rPr sz="1000" b="0">
+              <a:rPr sz="900" b="0">
                 <a:solidFill>
                   <a:srgbClr val="083C63"/>
                 </a:solidFill>
@@ -6851,7 +6851,7 @@
               </a:lnSpc>
             </a:pPr>
             <a:r>
-              <a:rPr sz="1000" b="0">
+              <a:rPr sz="900" b="0">
                 <a:solidFill>
                   <a:srgbClr val="083C63"/>
                 </a:solidFill>
@@ -7014,7 +7014,7 @@
               </a:lnSpc>
             </a:pPr>
             <a:r>
-              <a:rPr sz="1000" b="0">
+              <a:rPr sz="900" b="0">
                 <a:solidFill>
                   <a:srgbClr val="083C63"/>
                 </a:solidFill>
@@ -7138,7 +7138,7 @@
             <a:avLst/>
           </a:prstGeom>
           <a:solidFill>
-            <a:srgbClr val="F2F5F8"/>
+            <a:srgbClr val="083C63"/>
           </a:solidFill>
           <a:ln>
             <a:noFill/>
@@ -7171,7 +7171,7 @@
             <a:r>
               <a:rPr sz="1400" b="1">
                 <a:solidFill>
-                  <a:srgbClr val="083C63"/>
+                  <a:srgbClr val="FFFFFF"/>
                 </a:solidFill>
                 <a:latin typeface="Times New Roman"/>
                 <a:ea typeface="宋体"/>
@@ -7191,7 +7191,7 @@
             <a:r>
               <a:rPr sz="1200" b="0">
                 <a:solidFill>
-                  <a:srgbClr val="595959"/>
+                  <a:srgbClr val="DDE6EF"/>
                 </a:solidFill>
                 <a:latin typeface="Times New Roman"/>
                 <a:ea typeface="宋体"/>
@@ -7216,7 +7216,7 @@
             <a:avLst/>
           </a:prstGeom>
           <a:solidFill>
-            <a:srgbClr val="F2F5F8"/>
+            <a:srgbClr val="083C63"/>
           </a:solidFill>
           <a:ln>
             <a:noFill/>
@@ -7249,7 +7249,7 @@
             <a:r>
               <a:rPr sz="1400" b="1">
                 <a:solidFill>
-                  <a:srgbClr val="083C63"/>
+                  <a:srgbClr val="FFFFFF"/>
                 </a:solidFill>
                 <a:latin typeface="Times New Roman"/>
                 <a:ea typeface="宋体"/>
@@ -7269,7 +7269,7 @@
             <a:r>
               <a:rPr sz="1200" b="0">
                 <a:solidFill>
-                  <a:srgbClr val="595959"/>
+                  <a:srgbClr val="DDE6EF"/>
                 </a:solidFill>
                 <a:latin typeface="Times New Roman"/>
                 <a:ea typeface="宋体"/>
@@ -7294,7 +7294,7 @@
             <a:avLst/>
           </a:prstGeom>
           <a:solidFill>
-            <a:srgbClr val="F2F5F8"/>
+            <a:srgbClr val="083C63"/>
           </a:solidFill>
           <a:ln>
             <a:noFill/>
@@ -7327,7 +7327,7 @@
             <a:r>
               <a:rPr sz="1400" b="1">
                 <a:solidFill>
-                  <a:srgbClr val="083C63"/>
+                  <a:srgbClr val="FFFFFF"/>
                 </a:solidFill>
                 <a:latin typeface="Times New Roman"/>
                 <a:ea typeface="宋体"/>
@@ -7347,7 +7347,7 @@
             <a:r>
               <a:rPr sz="1200" b="0">
                 <a:solidFill>
-                  <a:srgbClr val="595959"/>
+                  <a:srgbClr val="DDE6EF"/>
                 </a:solidFill>
                 <a:latin typeface="Times New Roman"/>
                 <a:ea typeface="宋体"/>
@@ -7372,7 +7372,7 @@
             <a:avLst/>
           </a:prstGeom>
           <a:solidFill>
-            <a:srgbClr val="F2F5F8"/>
+            <a:srgbClr val="083C63"/>
           </a:solidFill>
           <a:ln>
             <a:noFill/>
@@ -7405,7 +7405,7 @@
             <a:r>
               <a:rPr sz="1400" b="1">
                 <a:solidFill>
-                  <a:srgbClr val="083C63"/>
+                  <a:srgbClr val="FFFFFF"/>
                 </a:solidFill>
                 <a:latin typeface="Times New Roman"/>
                 <a:ea typeface="宋体"/>
@@ -7425,7 +7425,7 @@
             <a:r>
               <a:rPr sz="1200" b="0">
                 <a:solidFill>
-                  <a:srgbClr val="595959"/>
+                  <a:srgbClr val="DDE6EF"/>
                 </a:solidFill>
                 <a:latin typeface="Times New Roman"/>
                 <a:ea typeface="宋体"/>
@@ -7450,7 +7450,7 @@
             <a:avLst/>
           </a:prstGeom>
           <a:solidFill>
-            <a:srgbClr val="F2F5F8"/>
+            <a:srgbClr val="083C63"/>
           </a:solidFill>
           <a:ln>
             <a:noFill/>
@@ -7483,7 +7483,7 @@
             <a:r>
               <a:rPr sz="1400" b="1">
                 <a:solidFill>
-                  <a:srgbClr val="083C63"/>
+                  <a:srgbClr val="FFFFFF"/>
                 </a:solidFill>
                 <a:latin typeface="Times New Roman"/>
                 <a:ea typeface="宋体"/>
@@ -7503,7 +7503,7 @@
             <a:r>
               <a:rPr sz="1200" b="0">
                 <a:solidFill>
-                  <a:srgbClr val="595959"/>
+                  <a:srgbClr val="DDE6EF"/>
                 </a:solidFill>
                 <a:latin typeface="Times New Roman"/>
                 <a:ea typeface="宋体"/>
@@ -7528,7 +7528,7 @@
             <a:avLst/>
           </a:prstGeom>
           <a:solidFill>
-            <a:srgbClr val="F2F5F8"/>
+            <a:srgbClr val="083C63"/>
           </a:solidFill>
           <a:ln>
             <a:noFill/>
@@ -7561,7 +7561,7 @@
             <a:r>
               <a:rPr sz="1400" b="1">
                 <a:solidFill>
-                  <a:srgbClr val="083C63"/>
+                  <a:srgbClr val="FFFFFF"/>
                 </a:solidFill>
                 <a:latin typeface="Times New Roman"/>
                 <a:ea typeface="宋体"/>
@@ -7581,7 +7581,7 @@
             <a:r>
               <a:rPr sz="1200" b="0">
                 <a:solidFill>
-                  <a:srgbClr val="595959"/>
+                  <a:srgbClr val="DDE6EF"/>
                 </a:solidFill>
                 <a:latin typeface="Times New Roman"/>
                 <a:ea typeface="宋体"/>
@@ -7619,7 +7619,7 @@
               </a:lnSpc>
             </a:pPr>
             <a:r>
-              <a:rPr sz="1000" b="0">
+              <a:rPr sz="900" b="0">
                 <a:solidFill>
                   <a:srgbClr val="083C63"/>
                 </a:solidFill>
@@ -7743,7 +7743,7 @@
             <a:avLst/>
           </a:prstGeom>
           <a:solidFill>
-            <a:srgbClr val="F2F5F8"/>
+            <a:srgbClr val="EF5149"/>
           </a:solidFill>
           <a:ln>
             <a:noFill/>
@@ -7776,7 +7776,7 @@
             <a:r>
               <a:rPr sz="1400" b="1">
                 <a:solidFill>
-                  <a:srgbClr val="083C63"/>
+                  <a:srgbClr val="FFFFFF"/>
                 </a:solidFill>
                 <a:latin typeface="Times New Roman"/>
                 <a:ea typeface="宋体"/>
@@ -7796,7 +7796,7 @@
             <a:r>
               <a:rPr sz="1200" b="0">
                 <a:solidFill>
-                  <a:srgbClr val="595959"/>
+                  <a:srgbClr val="FFEFED"/>
                 </a:solidFill>
                 <a:latin typeface="Times New Roman"/>
                 <a:ea typeface="宋体"/>
@@ -7821,7 +7821,7 @@
             <a:avLst/>
           </a:prstGeom>
           <a:solidFill>
-            <a:srgbClr val="F2F5F8"/>
+            <a:srgbClr val="EF5149"/>
           </a:solidFill>
           <a:ln>
             <a:noFill/>
@@ -7854,7 +7854,7 @@
             <a:r>
               <a:rPr sz="1400" b="1">
                 <a:solidFill>
-                  <a:srgbClr val="083C63"/>
+                  <a:srgbClr val="FFFFFF"/>
                 </a:solidFill>
                 <a:latin typeface="Times New Roman"/>
                 <a:ea typeface="宋体"/>
@@ -7874,7 +7874,7 @@
             <a:r>
               <a:rPr sz="1200" b="0">
                 <a:solidFill>
-                  <a:srgbClr val="595959"/>
+                  <a:srgbClr val="FFEFED"/>
                 </a:solidFill>
                 <a:latin typeface="Times New Roman"/>
                 <a:ea typeface="宋体"/>
@@ -7899,7 +7899,7 @@
             <a:avLst/>
           </a:prstGeom>
           <a:solidFill>
-            <a:srgbClr val="F2F5F8"/>
+            <a:srgbClr val="EF5149"/>
           </a:solidFill>
           <a:ln>
             <a:noFill/>
@@ -7932,7 +7932,7 @@
             <a:r>
               <a:rPr sz="1400" b="1">
                 <a:solidFill>
-                  <a:srgbClr val="083C63"/>
+                  <a:srgbClr val="FFFFFF"/>
                 </a:solidFill>
                 <a:latin typeface="Times New Roman"/>
                 <a:ea typeface="宋体"/>
@@ -7952,7 +7952,7 @@
             <a:r>
               <a:rPr sz="1200" b="0">
                 <a:solidFill>
-                  <a:srgbClr val="595959"/>
+                  <a:srgbClr val="FFEFED"/>
                 </a:solidFill>
                 <a:latin typeface="Times New Roman"/>
                 <a:ea typeface="宋体"/>
@@ -7977,7 +7977,7 @@
             <a:avLst/>
           </a:prstGeom>
           <a:solidFill>
-            <a:srgbClr val="F2F5F8"/>
+            <a:srgbClr val="EF5149"/>
           </a:solidFill>
           <a:ln>
             <a:noFill/>
@@ -8010,7 +8010,7 @@
             <a:r>
               <a:rPr sz="1400" b="1">
                 <a:solidFill>
-                  <a:srgbClr val="083C63"/>
+                  <a:srgbClr val="FFFFFF"/>
                 </a:solidFill>
                 <a:latin typeface="Times New Roman"/>
                 <a:ea typeface="宋体"/>
@@ -8030,7 +8030,7 @@
             <a:r>
               <a:rPr sz="1200" b="0">
                 <a:solidFill>
-                  <a:srgbClr val="595959"/>
+                  <a:srgbClr val="FFEFED"/>
                 </a:solidFill>
                 <a:latin typeface="Times New Roman"/>
                 <a:ea typeface="宋体"/>
@@ -8055,7 +8055,7 @@
             <a:avLst/>
           </a:prstGeom>
           <a:solidFill>
-            <a:srgbClr val="F2F5F8"/>
+            <a:srgbClr val="EF5149"/>
           </a:solidFill>
           <a:ln>
             <a:noFill/>
@@ -8088,7 +8088,7 @@
             <a:r>
               <a:rPr sz="1400" b="1">
                 <a:solidFill>
-                  <a:srgbClr val="083C63"/>
+                  <a:srgbClr val="FFFFFF"/>
                 </a:solidFill>
                 <a:latin typeface="Times New Roman"/>
                 <a:ea typeface="宋体"/>
@@ -8108,7 +8108,7 @@
             <a:r>
               <a:rPr sz="1200" b="0">
                 <a:solidFill>
-                  <a:srgbClr val="595959"/>
+                  <a:srgbClr val="FFEFED"/>
                 </a:solidFill>
                 <a:latin typeface="Times New Roman"/>
                 <a:ea typeface="宋体"/>
@@ -8133,7 +8133,7 @@
             <a:avLst/>
           </a:prstGeom>
           <a:solidFill>
-            <a:srgbClr val="F2F5F8"/>
+            <a:srgbClr val="EF5149"/>
           </a:solidFill>
           <a:ln>
             <a:noFill/>
@@ -8166,7 +8166,7 @@
             <a:r>
               <a:rPr sz="1400" b="1">
                 <a:solidFill>
-                  <a:srgbClr val="083C63"/>
+                  <a:srgbClr val="FFFFFF"/>
                 </a:solidFill>
                 <a:latin typeface="Times New Roman"/>
                 <a:ea typeface="宋体"/>
@@ -8186,7 +8186,7 @@
             <a:r>
               <a:rPr sz="1200" b="0">
                 <a:solidFill>
-                  <a:srgbClr val="595959"/>
+                  <a:srgbClr val="FFEFED"/>
                 </a:solidFill>
                 <a:latin typeface="Times New Roman"/>
                 <a:ea typeface="宋体"/>
@@ -8224,7 +8224,7 @@
               </a:lnSpc>
             </a:pPr>
             <a:r>
-              <a:rPr sz="1000" b="0">
+              <a:rPr sz="900" b="0">
                 <a:solidFill>
                   <a:srgbClr val="083C63"/>
                 </a:solidFill>
@@ -9217,7 +9217,7 @@
               </a:lnSpc>
             </a:pPr>
             <a:r>
-              <a:rPr sz="1000" b="0">
+              <a:rPr sz="900" b="0">
                 <a:solidFill>
                   <a:srgbClr val="083C63"/>
                 </a:solidFill>
@@ -9970,7 +9970,7 @@
               </a:lnSpc>
             </a:pPr>
             <a:r>
-              <a:rPr sz="1000" b="0">
+              <a:rPr sz="900" b="0">
                 <a:solidFill>
                   <a:srgbClr val="083C63"/>
                 </a:solidFill>
@@ -10843,7 +10843,7 @@
               </a:lnSpc>
             </a:pPr>
             <a:r>
-              <a:rPr sz="1000" b="0">
+              <a:rPr sz="900" b="0">
                 <a:solidFill>
                   <a:srgbClr val="083C63"/>
                 </a:solidFill>
@@ -11595,7 +11595,7 @@
               </a:lnSpc>
             </a:pPr>
             <a:r>
-              <a:rPr sz="1000" b="0">
+              <a:rPr sz="900" b="0">
                 <a:solidFill>
                   <a:srgbClr val="083C63"/>
                 </a:solidFill>
@@ -12001,7 +12001,7 @@
               </a:lnSpc>
             </a:pPr>
             <a:r>
-              <a:rPr sz="1000" b="0">
+              <a:rPr sz="900" b="0">
                 <a:solidFill>
                   <a:srgbClr val="083C63"/>
                 </a:solidFill>

--- a/docs/usage_deck/final/机台log分析使用说明.pptx
+++ b/docs/usage_deck/final/机台log分析使用说明.pptx
@@ -5301,10 +5301,12 @@
             <a:avLst/>
           </a:prstGeom>
           <a:solidFill>
-            <a:srgbClr val="083C63"/>
+            <a:srgbClr val="FAE7DA"/>
           </a:solidFill>
-          <a:ln>
-            <a:noFill/>
+          <a:ln w="9525">
+            <a:solidFill>
+              <a:srgbClr val="FFFFFF"/>
+            </a:solidFill>
           </a:ln>
           <a:effectLst/>
         </p:spPr>
@@ -5334,7 +5336,7 @@
             <a:r>
               <a:rPr sz="1400" b="1">
                 <a:solidFill>
-                  <a:srgbClr val="FFFFFF"/>
+                  <a:srgbClr val="2E3B4E"/>
                 </a:solidFill>
                 <a:latin typeface="Times New Roman"/>
                 <a:ea typeface="宋体"/>
@@ -5354,7 +5356,7 @@
             <a:r>
               <a:rPr sz="1200" b="0">
                 <a:solidFill>
-                  <a:srgbClr val="DDE6EF"/>
+                  <a:srgbClr val="525F6F"/>
                 </a:solidFill>
                 <a:latin typeface="Times New Roman"/>
                 <a:ea typeface="宋体"/>
@@ -5379,10 +5381,12 @@
             <a:avLst/>
           </a:prstGeom>
           <a:solidFill>
-            <a:srgbClr val="083C63"/>
+            <a:srgbClr val="EFE8F7"/>
           </a:solidFill>
-          <a:ln>
-            <a:noFill/>
+          <a:ln w="9525">
+            <a:solidFill>
+              <a:srgbClr val="FFFFFF"/>
+            </a:solidFill>
           </a:ln>
           <a:effectLst/>
         </p:spPr>
@@ -5412,7 +5416,7 @@
             <a:r>
               <a:rPr sz="1400" b="1">
                 <a:solidFill>
-                  <a:srgbClr val="FFFFFF"/>
+                  <a:srgbClr val="2E3B4E"/>
                 </a:solidFill>
                 <a:latin typeface="Times New Roman"/>
                 <a:ea typeface="宋体"/>
@@ -5432,7 +5436,7 @@
             <a:r>
               <a:rPr sz="1200" b="0">
                 <a:solidFill>
-                  <a:srgbClr val="DDE6EF"/>
+                  <a:srgbClr val="525F6F"/>
                 </a:solidFill>
                 <a:latin typeface="Times New Roman"/>
                 <a:ea typeface="宋体"/>
@@ -5457,10 +5461,12 @@
             <a:avLst/>
           </a:prstGeom>
           <a:solidFill>
-            <a:srgbClr val="083C63"/>
+            <a:srgbClr val="E7F1FA"/>
           </a:solidFill>
-          <a:ln>
-            <a:noFill/>
+          <a:ln w="9525">
+            <a:solidFill>
+              <a:srgbClr val="FFFFFF"/>
+            </a:solidFill>
           </a:ln>
           <a:effectLst/>
         </p:spPr>
@@ -5490,7 +5496,7 @@
             <a:r>
               <a:rPr sz="1400" b="1">
                 <a:solidFill>
-                  <a:srgbClr val="FFFFFF"/>
+                  <a:srgbClr val="2E3B4E"/>
                 </a:solidFill>
                 <a:latin typeface="Times New Roman"/>
                 <a:ea typeface="宋体"/>
@@ -5510,7 +5516,7 @@
             <a:r>
               <a:rPr sz="1200" b="0">
                 <a:solidFill>
-                  <a:srgbClr val="DDE6EF"/>
+                  <a:srgbClr val="525F6F"/>
                 </a:solidFill>
                 <a:latin typeface="Times New Roman"/>
                 <a:ea typeface="宋体"/>
@@ -6273,10 +6279,12 @@
             <a:avLst/>
           </a:prstGeom>
           <a:solidFill>
-            <a:srgbClr val="083C63"/>
+            <a:srgbClr val="E0F2F1"/>
           </a:solidFill>
-          <a:ln>
-            <a:noFill/>
+          <a:ln w="9525">
+            <a:solidFill>
+              <a:srgbClr val="FFFFFF"/>
+            </a:solidFill>
           </a:ln>
           <a:effectLst/>
         </p:spPr>
@@ -6306,7 +6314,7 @@
             <a:r>
               <a:rPr sz="1400" b="1">
                 <a:solidFill>
-                  <a:srgbClr val="FFFFFF"/>
+                  <a:srgbClr val="2E3B4E"/>
                 </a:solidFill>
                 <a:latin typeface="Times New Roman"/>
                 <a:ea typeface="宋体"/>
@@ -6326,7 +6334,7 @@
             <a:r>
               <a:rPr sz="1200" b="0">
                 <a:solidFill>
-                  <a:srgbClr val="DDE6EF"/>
+                  <a:srgbClr val="525F6F"/>
                 </a:solidFill>
                 <a:latin typeface="Times New Roman"/>
                 <a:ea typeface="宋体"/>
@@ -6351,10 +6359,12 @@
             <a:avLst/>
           </a:prstGeom>
           <a:solidFill>
-            <a:srgbClr val="083C63"/>
+            <a:srgbClr val="E7F3E6"/>
           </a:solidFill>
-          <a:ln>
-            <a:noFill/>
+          <a:ln w="9525">
+            <a:solidFill>
+              <a:srgbClr val="FFFFFF"/>
+            </a:solidFill>
           </a:ln>
           <a:effectLst/>
         </p:spPr>
@@ -6384,7 +6394,7 @@
             <a:r>
               <a:rPr sz="1400" b="1">
                 <a:solidFill>
-                  <a:srgbClr val="FFFFFF"/>
+                  <a:srgbClr val="2E3B4E"/>
                 </a:solidFill>
                 <a:latin typeface="Times New Roman"/>
                 <a:ea typeface="宋体"/>
@@ -6404,7 +6414,7 @@
             <a:r>
               <a:rPr sz="1200" b="0">
                 <a:solidFill>
-                  <a:srgbClr val="DDE6EF"/>
+                  <a:srgbClr val="525F6F"/>
                 </a:solidFill>
                 <a:latin typeface="Times New Roman"/>
                 <a:ea typeface="宋体"/>
@@ -6429,10 +6439,12 @@
             <a:avLst/>
           </a:prstGeom>
           <a:solidFill>
-            <a:srgbClr val="083C63"/>
+            <a:srgbClr val="FBF2DA"/>
           </a:solidFill>
-          <a:ln>
-            <a:noFill/>
+          <a:ln w="9525">
+            <a:solidFill>
+              <a:srgbClr val="FFFFFF"/>
+            </a:solidFill>
           </a:ln>
           <a:effectLst/>
         </p:spPr>
@@ -6462,7 +6474,7 @@
             <a:r>
               <a:rPr sz="1400" b="1">
                 <a:solidFill>
-                  <a:srgbClr val="FFFFFF"/>
+                  <a:srgbClr val="2E3B4E"/>
                 </a:solidFill>
                 <a:latin typeface="Times New Roman"/>
                 <a:ea typeface="宋体"/>
@@ -6482,7 +6494,7 @@
             <a:r>
               <a:rPr sz="1200" b="0">
                 <a:solidFill>
-                  <a:srgbClr val="DDE6EF"/>
+                  <a:srgbClr val="525F6F"/>
                 </a:solidFill>
                 <a:latin typeface="Times New Roman"/>
                 <a:ea typeface="宋体"/>
@@ -6507,10 +6519,12 @@
             <a:avLst/>
           </a:prstGeom>
           <a:solidFill>
-            <a:srgbClr val="083C63"/>
+            <a:srgbClr val="FAE7DA"/>
           </a:solidFill>
-          <a:ln>
-            <a:noFill/>
+          <a:ln w="9525">
+            <a:solidFill>
+              <a:srgbClr val="FFFFFF"/>
+            </a:solidFill>
           </a:ln>
           <a:effectLst/>
         </p:spPr>
@@ -6540,7 +6554,7 @@
             <a:r>
               <a:rPr sz="1400" b="1">
                 <a:solidFill>
-                  <a:srgbClr val="FFFFFF"/>
+                  <a:srgbClr val="2E3B4E"/>
                 </a:solidFill>
                 <a:latin typeface="Times New Roman"/>
                 <a:ea typeface="宋体"/>
@@ -6560,7 +6574,7 @@
             <a:r>
               <a:rPr sz="1200" b="0">
                 <a:solidFill>
-                  <a:srgbClr val="DDE6EF"/>
+                  <a:srgbClr val="525F6F"/>
                 </a:solidFill>
                 <a:latin typeface="Times New Roman"/>
                 <a:ea typeface="宋体"/>
@@ -7138,10 +7152,12 @@
             <a:avLst/>
           </a:prstGeom>
           <a:solidFill>
-            <a:srgbClr val="083C63"/>
+            <a:srgbClr val="E7F1FA"/>
           </a:solidFill>
-          <a:ln>
-            <a:noFill/>
+          <a:ln w="9525">
+            <a:solidFill>
+              <a:srgbClr val="FFFFFF"/>
+            </a:solidFill>
           </a:ln>
           <a:effectLst/>
         </p:spPr>
@@ -7171,7 +7187,7 @@
             <a:r>
               <a:rPr sz="1400" b="1">
                 <a:solidFill>
-                  <a:srgbClr val="FFFFFF"/>
+                  <a:srgbClr val="2E3B4E"/>
                 </a:solidFill>
                 <a:latin typeface="Times New Roman"/>
                 <a:ea typeface="宋体"/>
@@ -7191,7 +7207,7 @@
             <a:r>
               <a:rPr sz="1200" b="0">
                 <a:solidFill>
-                  <a:srgbClr val="DDE6EF"/>
+                  <a:srgbClr val="525F6F"/>
                 </a:solidFill>
                 <a:latin typeface="Times New Roman"/>
                 <a:ea typeface="宋体"/>
@@ -7216,10 +7232,12 @@
             <a:avLst/>
           </a:prstGeom>
           <a:solidFill>
-            <a:srgbClr val="083C63"/>
+            <a:srgbClr val="E0F2F1"/>
           </a:solidFill>
-          <a:ln>
-            <a:noFill/>
+          <a:ln w="9525">
+            <a:solidFill>
+              <a:srgbClr val="FFFFFF"/>
+            </a:solidFill>
           </a:ln>
           <a:effectLst/>
         </p:spPr>
@@ -7249,7 +7267,7 @@
             <a:r>
               <a:rPr sz="1400" b="1">
                 <a:solidFill>
-                  <a:srgbClr val="FFFFFF"/>
+                  <a:srgbClr val="2E3B4E"/>
                 </a:solidFill>
                 <a:latin typeface="Times New Roman"/>
                 <a:ea typeface="宋体"/>
@@ -7269,7 +7287,7 @@
             <a:r>
               <a:rPr sz="1200" b="0">
                 <a:solidFill>
-                  <a:srgbClr val="DDE6EF"/>
+                  <a:srgbClr val="525F6F"/>
                 </a:solidFill>
                 <a:latin typeface="Times New Roman"/>
                 <a:ea typeface="宋体"/>
@@ -7294,10 +7312,12 @@
             <a:avLst/>
           </a:prstGeom>
           <a:solidFill>
-            <a:srgbClr val="083C63"/>
+            <a:srgbClr val="E7F3E6"/>
           </a:solidFill>
-          <a:ln>
-            <a:noFill/>
+          <a:ln w="9525">
+            <a:solidFill>
+              <a:srgbClr val="FFFFFF"/>
+            </a:solidFill>
           </a:ln>
           <a:effectLst/>
         </p:spPr>
@@ -7327,7 +7347,7 @@
             <a:r>
               <a:rPr sz="1400" b="1">
                 <a:solidFill>
-                  <a:srgbClr val="FFFFFF"/>
+                  <a:srgbClr val="2E3B4E"/>
                 </a:solidFill>
                 <a:latin typeface="Times New Roman"/>
                 <a:ea typeface="宋体"/>
@@ -7347,7 +7367,7 @@
             <a:r>
               <a:rPr sz="1200" b="0">
                 <a:solidFill>
-                  <a:srgbClr val="DDE6EF"/>
+                  <a:srgbClr val="525F6F"/>
                 </a:solidFill>
                 <a:latin typeface="Times New Roman"/>
                 <a:ea typeface="宋体"/>
@@ -7372,10 +7392,12 @@
             <a:avLst/>
           </a:prstGeom>
           <a:solidFill>
-            <a:srgbClr val="083C63"/>
+            <a:srgbClr val="FBF2DA"/>
           </a:solidFill>
-          <a:ln>
-            <a:noFill/>
+          <a:ln w="9525">
+            <a:solidFill>
+              <a:srgbClr val="FFFFFF"/>
+            </a:solidFill>
           </a:ln>
           <a:effectLst/>
         </p:spPr>
@@ -7405,7 +7427,7 @@
             <a:r>
               <a:rPr sz="1400" b="1">
                 <a:solidFill>
-                  <a:srgbClr val="FFFFFF"/>
+                  <a:srgbClr val="2E3B4E"/>
                 </a:solidFill>
                 <a:latin typeface="Times New Roman"/>
                 <a:ea typeface="宋体"/>
@@ -7425,7 +7447,7 @@
             <a:r>
               <a:rPr sz="1200" b="0">
                 <a:solidFill>
-                  <a:srgbClr val="DDE6EF"/>
+                  <a:srgbClr val="525F6F"/>
                 </a:solidFill>
                 <a:latin typeface="Times New Roman"/>
                 <a:ea typeface="宋体"/>
@@ -7450,10 +7472,12 @@
             <a:avLst/>
           </a:prstGeom>
           <a:solidFill>
-            <a:srgbClr val="083C63"/>
+            <a:srgbClr val="FAE7DA"/>
           </a:solidFill>
-          <a:ln>
-            <a:noFill/>
+          <a:ln w="9525">
+            <a:solidFill>
+              <a:srgbClr val="FFFFFF"/>
+            </a:solidFill>
           </a:ln>
           <a:effectLst/>
         </p:spPr>
@@ -7483,7 +7507,7 @@
             <a:r>
               <a:rPr sz="1400" b="1">
                 <a:solidFill>
-                  <a:srgbClr val="FFFFFF"/>
+                  <a:srgbClr val="2E3B4E"/>
                 </a:solidFill>
                 <a:latin typeface="Times New Roman"/>
                 <a:ea typeface="宋体"/>
@@ -7503,7 +7527,7 @@
             <a:r>
               <a:rPr sz="1200" b="0">
                 <a:solidFill>
-                  <a:srgbClr val="DDE6EF"/>
+                  <a:srgbClr val="525F6F"/>
                 </a:solidFill>
                 <a:latin typeface="Times New Roman"/>
                 <a:ea typeface="宋体"/>
@@ -7528,10 +7552,12 @@
             <a:avLst/>
           </a:prstGeom>
           <a:solidFill>
-            <a:srgbClr val="083C63"/>
+            <a:srgbClr val="EFE8F7"/>
           </a:solidFill>
-          <a:ln>
-            <a:noFill/>
+          <a:ln w="9525">
+            <a:solidFill>
+              <a:srgbClr val="FFFFFF"/>
+            </a:solidFill>
           </a:ln>
           <a:effectLst/>
         </p:spPr>
@@ -7561,7 +7587,7 @@
             <a:r>
               <a:rPr sz="1400" b="1">
                 <a:solidFill>
-                  <a:srgbClr val="FFFFFF"/>
+                  <a:srgbClr val="2E3B4E"/>
                 </a:solidFill>
                 <a:latin typeface="Times New Roman"/>
                 <a:ea typeface="宋体"/>
@@ -7581,7 +7607,7 @@
             <a:r>
               <a:rPr sz="1200" b="0">
                 <a:solidFill>
-                  <a:srgbClr val="DDE6EF"/>
+                  <a:srgbClr val="525F6F"/>
                 </a:solidFill>
                 <a:latin typeface="Times New Roman"/>
                 <a:ea typeface="宋体"/>
@@ -7743,10 +7769,12 @@
             <a:avLst/>
           </a:prstGeom>
           <a:solidFill>
-            <a:srgbClr val="EF5149"/>
+            <a:srgbClr val="E7F3E6"/>
           </a:solidFill>
-          <a:ln>
-            <a:noFill/>
+          <a:ln w="9525">
+            <a:solidFill>
+              <a:srgbClr val="FFFFFF"/>
+            </a:solidFill>
           </a:ln>
           <a:effectLst/>
         </p:spPr>
@@ -7776,7 +7804,7 @@
             <a:r>
               <a:rPr sz="1400" b="1">
                 <a:solidFill>
-                  <a:srgbClr val="FFFFFF"/>
+                  <a:srgbClr val="2E3B4E"/>
                 </a:solidFill>
                 <a:latin typeface="Times New Roman"/>
                 <a:ea typeface="宋体"/>
@@ -7796,7 +7824,7 @@
             <a:r>
               <a:rPr sz="1200" b="0">
                 <a:solidFill>
-                  <a:srgbClr val="FFEFED"/>
+                  <a:srgbClr val="525F6F"/>
                 </a:solidFill>
                 <a:latin typeface="Times New Roman"/>
                 <a:ea typeface="宋体"/>
@@ -7821,10 +7849,12 @@
             <a:avLst/>
           </a:prstGeom>
           <a:solidFill>
-            <a:srgbClr val="EF5149"/>
+            <a:srgbClr val="FBF2DA"/>
           </a:solidFill>
-          <a:ln>
-            <a:noFill/>
+          <a:ln w="9525">
+            <a:solidFill>
+              <a:srgbClr val="FFFFFF"/>
+            </a:solidFill>
           </a:ln>
           <a:effectLst/>
         </p:spPr>
@@ -7854,7 +7884,7 @@
             <a:r>
               <a:rPr sz="1400" b="1">
                 <a:solidFill>
-                  <a:srgbClr val="FFFFFF"/>
+                  <a:srgbClr val="2E3B4E"/>
                 </a:solidFill>
                 <a:latin typeface="Times New Roman"/>
                 <a:ea typeface="宋体"/>
@@ -7874,7 +7904,7 @@
             <a:r>
               <a:rPr sz="1200" b="0">
                 <a:solidFill>
-                  <a:srgbClr val="FFEFED"/>
+                  <a:srgbClr val="525F6F"/>
                 </a:solidFill>
                 <a:latin typeface="Times New Roman"/>
                 <a:ea typeface="宋体"/>
@@ -7899,10 +7929,12 @@
             <a:avLst/>
           </a:prstGeom>
           <a:solidFill>
-            <a:srgbClr val="EF5149"/>
+            <a:srgbClr val="FAE7DA"/>
           </a:solidFill>
-          <a:ln>
-            <a:noFill/>
+          <a:ln w="9525">
+            <a:solidFill>
+              <a:srgbClr val="FFFFFF"/>
+            </a:solidFill>
           </a:ln>
           <a:effectLst/>
         </p:spPr>
@@ -7932,7 +7964,7 @@
             <a:r>
               <a:rPr sz="1400" b="1">
                 <a:solidFill>
-                  <a:srgbClr val="FFFFFF"/>
+                  <a:srgbClr val="2E3B4E"/>
                 </a:solidFill>
                 <a:latin typeface="Times New Roman"/>
                 <a:ea typeface="宋体"/>
@@ -7952,7 +7984,7 @@
             <a:r>
               <a:rPr sz="1200" b="0">
                 <a:solidFill>
-                  <a:srgbClr val="FFEFED"/>
+                  <a:srgbClr val="525F6F"/>
                 </a:solidFill>
                 <a:latin typeface="Times New Roman"/>
                 <a:ea typeface="宋体"/>
@@ -7977,10 +8009,12 @@
             <a:avLst/>
           </a:prstGeom>
           <a:solidFill>
-            <a:srgbClr val="EF5149"/>
+            <a:srgbClr val="EFE8F7"/>
           </a:solidFill>
-          <a:ln>
-            <a:noFill/>
+          <a:ln w="9525">
+            <a:solidFill>
+              <a:srgbClr val="FFFFFF"/>
+            </a:solidFill>
           </a:ln>
           <a:effectLst/>
         </p:spPr>
@@ -8010,7 +8044,7 @@
             <a:r>
               <a:rPr sz="1400" b="1">
                 <a:solidFill>
-                  <a:srgbClr val="FFFFFF"/>
+                  <a:srgbClr val="2E3B4E"/>
                 </a:solidFill>
                 <a:latin typeface="Times New Roman"/>
                 <a:ea typeface="宋体"/>
@@ -8030,7 +8064,7 @@
             <a:r>
               <a:rPr sz="1200" b="0">
                 <a:solidFill>
-                  <a:srgbClr val="FFEFED"/>
+                  <a:srgbClr val="525F6F"/>
                 </a:solidFill>
                 <a:latin typeface="Times New Roman"/>
                 <a:ea typeface="宋体"/>
@@ -8055,10 +8089,12 @@
             <a:avLst/>
           </a:prstGeom>
           <a:solidFill>
-            <a:srgbClr val="EF5149"/>
+            <a:srgbClr val="E7F1FA"/>
           </a:solidFill>
-          <a:ln>
-            <a:noFill/>
+          <a:ln w="9525">
+            <a:solidFill>
+              <a:srgbClr val="FFFFFF"/>
+            </a:solidFill>
           </a:ln>
           <a:effectLst/>
         </p:spPr>
@@ -8088,7 +8124,7 @@
             <a:r>
               <a:rPr sz="1400" b="1">
                 <a:solidFill>
-                  <a:srgbClr val="FFFFFF"/>
+                  <a:srgbClr val="2E3B4E"/>
                 </a:solidFill>
                 <a:latin typeface="Times New Roman"/>
                 <a:ea typeface="宋体"/>
@@ -8108,7 +8144,7 @@
             <a:r>
               <a:rPr sz="1200" b="0">
                 <a:solidFill>
-                  <a:srgbClr val="FFEFED"/>
+                  <a:srgbClr val="525F6F"/>
                 </a:solidFill>
                 <a:latin typeface="Times New Roman"/>
                 <a:ea typeface="宋体"/>
@@ -8133,10 +8169,12 @@
             <a:avLst/>
           </a:prstGeom>
           <a:solidFill>
-            <a:srgbClr val="EF5149"/>
+            <a:srgbClr val="E0F2F1"/>
           </a:solidFill>
-          <a:ln>
-            <a:noFill/>
+          <a:ln w="9525">
+            <a:solidFill>
+              <a:srgbClr val="FFFFFF"/>
+            </a:solidFill>
           </a:ln>
           <a:effectLst/>
         </p:spPr>
@@ -8166,7 +8204,7 @@
             <a:r>
               <a:rPr sz="1400" b="1">
                 <a:solidFill>
-                  <a:srgbClr val="FFFFFF"/>
+                  <a:srgbClr val="2E3B4E"/>
                 </a:solidFill>
                 <a:latin typeface="Times New Roman"/>
                 <a:ea typeface="宋体"/>
@@ -8186,7 +8224,7 @@
             <a:r>
               <a:rPr sz="1200" b="0">
                 <a:solidFill>
-                  <a:srgbClr val="FFEFED"/>
+                  <a:srgbClr val="525F6F"/>
                 </a:solidFill>
                 <a:latin typeface="Times New Roman"/>
                 <a:ea typeface="宋体"/>

--- a/docs/usage_deck/final/机台log分析使用说明.pptx
+++ b/docs/usage_deck/final/机台log分析使用说明.pptx
@@ -5295,7 +5295,7 @@
         <p:spPr>
           <a:xfrm>
             <a:off x="640080" y="1600200"/>
-            <a:ext cx="3566160" cy="2057400"/>
+            <a:ext cx="3566160" cy="2651760"/>
           </a:xfrm>
           <a:prstGeom prst="rect">
             <a:avLst/>
@@ -5334,7 +5334,7 @@
               </a:lnSpc>
             </a:pPr>
             <a:r>
-              <a:rPr sz="1400" b="1">
+              <a:rPr sz="1600" b="1">
                 <a:solidFill>
                   <a:srgbClr val="2E3B4E"/>
                 </a:solidFill>
@@ -5354,7 +5354,7 @@
               </a:spcBef>
             </a:pPr>
             <a:r>
-              <a:rPr sz="1200" b="0">
+              <a:rPr sz="1400" b="0">
                 <a:solidFill>
                   <a:srgbClr val="525F6F"/>
                 </a:solidFill>
@@ -5375,7 +5375,7 @@
         <p:spPr>
           <a:xfrm>
             <a:off x="4334256" y="1600200"/>
-            <a:ext cx="3566160" cy="2057400"/>
+            <a:ext cx="3566160" cy="2651760"/>
           </a:xfrm>
           <a:prstGeom prst="rect">
             <a:avLst/>
@@ -5414,7 +5414,7 @@
               </a:lnSpc>
             </a:pPr>
             <a:r>
-              <a:rPr sz="1400" b="1">
+              <a:rPr sz="1600" b="1">
                 <a:solidFill>
                   <a:srgbClr val="2E3B4E"/>
                 </a:solidFill>
@@ -5434,7 +5434,7 @@
               </a:spcBef>
             </a:pPr>
             <a:r>
-              <a:rPr sz="1200" b="0">
+              <a:rPr sz="1400" b="0">
                 <a:solidFill>
                   <a:srgbClr val="525F6F"/>
                 </a:solidFill>
@@ -5455,7 +5455,7 @@
         <p:spPr>
           <a:xfrm>
             <a:off x="8028431" y="1600200"/>
-            <a:ext cx="3566160" cy="2057400"/>
+            <a:ext cx="3566160" cy="2651760"/>
           </a:xfrm>
           <a:prstGeom prst="rect">
             <a:avLst/>
@@ -5494,7 +5494,7 @@
               </a:lnSpc>
             </a:pPr>
             <a:r>
-              <a:rPr sz="1400" b="1">
+              <a:rPr sz="1600" b="1">
                 <a:solidFill>
                   <a:srgbClr val="2E3B4E"/>
                 </a:solidFill>
@@ -5514,7 +5514,7 @@
               </a:spcBef>
             </a:pPr>
             <a:r>
-              <a:rPr sz="1200" b="0">
+              <a:rPr sz="1400" b="0">
                 <a:solidFill>
                   <a:srgbClr val="525F6F"/>
                 </a:solidFill>
@@ -5529,6 +5529,97 @@
       <p:sp>
         <p:nvSpPr>
           <p:cNvPr id="8" name="TextBox 7"/>
+          <p:cNvSpPr txBox="1"/>
+          <p:nvPr/>
+        </p:nvSpPr>
+        <p:spPr>
+          <a:xfrm>
+            <a:off x="640080" y="4892040"/>
+            <a:ext cx="10972800" cy="1097280"/>
+          </a:xfrm>
+          <a:prstGeom prst="rect">
+            <a:avLst/>
+          </a:prstGeom>
+          <a:noFill/>
+        </p:spPr>
+        <p:txBody>
+          <a:bodyPr wrap="square" anchor="t" lIns="0" rIns="0" tIns="0" bIns="0">
+            <a:spAutoFit/>
+          </a:bodyPr>
+          <a:lstStyle/>
+          <a:p>
+            <a:pPr algn="l">
+              <a:lnSpc>
+                <a:spcPct val="150000"/>
+              </a:lnSpc>
+            </a:pPr>
+            <a:r>
+              <a:rPr sz="1400" b="0">
+                <a:solidFill>
+                  <a:srgbClr val="595959"/>
+                </a:solidFill>
+                <a:latin typeface="Times New Roman"/>
+                <a:ea typeface="宋体"/>
+              </a:rPr>
+              <a:t>停机分类：EReason 清单中的计划停机（Planned / Routine）计入 pDT，其余计入 uDT；</a:t>
+            </a:r>
+          </a:p>
+          <a:p>
+            <a:pPr algn="l">
+              <a:lnSpc>
+                <a:spcPct val="150000"/>
+              </a:lnSpc>
+            </a:pPr>
+            <a:r>
+              <a:rPr sz="1400" b="0">
+                <a:solidFill>
+                  <a:srgbClr val="595959"/>
+                </a:solidFill>
+                <a:latin typeface="Times New Roman"/>
+                <a:ea typeface="宋体"/>
+              </a:rPr>
+              <a:t>未填计划停机 ReasonID 时，全部停机计入可用性损失。</a:t>
+            </a:r>
+          </a:p>
+          <a:p>
+            <a:pPr algn="l">
+              <a:lnSpc>
+                <a:spcPct val="150000"/>
+              </a:lnSpc>
+            </a:pPr>
+            <a:r>
+              <a:rPr sz="1400" b="0">
+                <a:solidFill>
+                  <a:srgbClr val="595959"/>
+                </a:solidFill>
+                <a:latin typeface="Times New Roman"/>
+                <a:ea typeface="宋体"/>
+              </a:rPr>
+              <a:t/>
+            </a:r>
+          </a:p>
+          <a:p>
+            <a:pPr algn="l">
+              <a:lnSpc>
+                <a:spcPct val="150000"/>
+              </a:lnSpc>
+            </a:pPr>
+            <a:r>
+              <a:rPr sz="1400" b="0">
+                <a:solidFill>
+                  <a:srgbClr val="595959"/>
+                </a:solidFill>
+                <a:latin typeface="Times New Roman"/>
+                <a:ea typeface="宋体"/>
+              </a:rPr>
+              <a:t>状态推导：优先识别日志中的 status:RUN / IDLE / DOWN 行；无 status 行时按活动与停机关键词推导时间线。</a:t>
+            </a:r>
+          </a:p>
+        </p:txBody>
+      </p:sp>
+      <p:sp>
+        <p:nvSpPr>
+          <p:cNvPr id="9" name="TextBox 8"/>
           <p:cNvSpPr txBox="1"/>
           <p:nvPr/>
         </p:nvSpPr>
@@ -6273,7 +6364,7 @@
         <p:spPr>
           <a:xfrm>
             <a:off x="640080" y="1600200"/>
-            <a:ext cx="5440680" cy="2057400"/>
+            <a:ext cx="5440680" cy="2240280"/>
           </a:xfrm>
           <a:prstGeom prst="rect">
             <a:avLst/>
@@ -6312,7 +6403,7 @@
               </a:lnSpc>
             </a:pPr>
             <a:r>
-              <a:rPr sz="1400" b="1">
+              <a:rPr sz="1600" b="1">
                 <a:solidFill>
                   <a:srgbClr val="2E3B4E"/>
                 </a:solidFill>
@@ -6332,7 +6423,7 @@
               </a:spcBef>
             </a:pPr>
             <a:r>
-              <a:rPr sz="1200" b="0">
+              <a:rPr sz="1400" b="0">
                 <a:solidFill>
                   <a:srgbClr val="525F6F"/>
                 </a:solidFill>
@@ -6353,7 +6444,7 @@
         <p:spPr>
           <a:xfrm>
             <a:off x="6208776" y="1600200"/>
-            <a:ext cx="5440680" cy="2057400"/>
+            <a:ext cx="5440680" cy="2240280"/>
           </a:xfrm>
           <a:prstGeom prst="rect">
             <a:avLst/>
@@ -6392,7 +6483,7 @@
               </a:lnSpc>
             </a:pPr>
             <a:r>
-              <a:rPr sz="1400" b="1">
+              <a:rPr sz="1600" b="1">
                 <a:solidFill>
                   <a:srgbClr val="2E3B4E"/>
                 </a:solidFill>
@@ -6412,7 +6503,7 @@
               </a:spcBef>
             </a:pPr>
             <a:r>
-              <a:rPr sz="1200" b="0">
+              <a:rPr sz="1400" b="0">
                 <a:solidFill>
                   <a:srgbClr val="525F6F"/>
                 </a:solidFill>
@@ -6432,8 +6523,8 @@
         </p:nvSpPr>
         <p:spPr>
           <a:xfrm>
-            <a:off x="640080" y="3840480"/>
-            <a:ext cx="5440680" cy="2057400"/>
+            <a:off x="640080" y="4023360"/>
+            <a:ext cx="5440680" cy="2240280"/>
           </a:xfrm>
           <a:prstGeom prst="rect">
             <a:avLst/>
@@ -6472,7 +6563,7 @@
               </a:lnSpc>
             </a:pPr>
             <a:r>
-              <a:rPr sz="1400" b="1">
+              <a:rPr sz="1600" b="1">
                 <a:solidFill>
                   <a:srgbClr val="2E3B4E"/>
                 </a:solidFill>
@@ -6492,7 +6583,7 @@
               </a:spcBef>
             </a:pPr>
             <a:r>
-              <a:rPr sz="1200" b="0">
+              <a:rPr sz="1400" b="0">
                 <a:solidFill>
                   <a:srgbClr val="525F6F"/>
                 </a:solidFill>
@@ -6512,8 +6603,8 @@
         </p:nvSpPr>
         <p:spPr>
           <a:xfrm>
-            <a:off x="6208776" y="3840480"/>
-            <a:ext cx="5440680" cy="2057400"/>
+            <a:off x="6208776" y="4023360"/>
+            <a:ext cx="5440680" cy="2240280"/>
           </a:xfrm>
           <a:prstGeom prst="rect">
             <a:avLst/>
@@ -6552,7 +6643,7 @@
               </a:lnSpc>
             </a:pPr>
             <a:r>
-              <a:rPr sz="1400" b="1">
+              <a:rPr sz="1600" b="1">
                 <a:solidFill>
                   <a:srgbClr val="2E3B4E"/>
                 </a:solidFill>
@@ -6572,7 +6663,7 @@
               </a:spcBef>
             </a:pPr>
             <a:r>
-              <a:rPr sz="1200" b="0">
+              <a:rPr sz="1400" b="0">
                 <a:solidFill>
                   <a:srgbClr val="525F6F"/>
                 </a:solidFill>
@@ -7146,7 +7237,7 @@
         <p:spPr>
           <a:xfrm>
             <a:off x="640080" y="1600200"/>
-            <a:ext cx="3566160" cy="2057400"/>
+            <a:ext cx="3566160" cy="2240280"/>
           </a:xfrm>
           <a:prstGeom prst="rect">
             <a:avLst/>
@@ -7185,7 +7276,7 @@
               </a:lnSpc>
             </a:pPr>
             <a:r>
-              <a:rPr sz="1400" b="1">
+              <a:rPr sz="1600" b="1">
                 <a:solidFill>
                   <a:srgbClr val="2E3B4E"/>
                 </a:solidFill>
@@ -7205,7 +7296,7 @@
               </a:spcBef>
             </a:pPr>
             <a:r>
-              <a:rPr sz="1200" b="0">
+              <a:rPr sz="1400" b="0">
                 <a:solidFill>
                   <a:srgbClr val="525F6F"/>
                 </a:solidFill>
@@ -7226,7 +7317,7 @@
         <p:spPr>
           <a:xfrm>
             <a:off x="4334256" y="1600200"/>
-            <a:ext cx="3566160" cy="2057400"/>
+            <a:ext cx="3566160" cy="2240280"/>
           </a:xfrm>
           <a:prstGeom prst="rect">
             <a:avLst/>
@@ -7265,7 +7356,7 @@
               </a:lnSpc>
             </a:pPr>
             <a:r>
-              <a:rPr sz="1400" b="1">
+              <a:rPr sz="1600" b="1">
                 <a:solidFill>
                   <a:srgbClr val="2E3B4E"/>
                 </a:solidFill>
@@ -7285,7 +7376,7 @@
               </a:spcBef>
             </a:pPr>
             <a:r>
-              <a:rPr sz="1200" b="0">
+              <a:rPr sz="1400" b="0">
                 <a:solidFill>
                   <a:srgbClr val="525F6F"/>
                 </a:solidFill>
@@ -7306,7 +7397,7 @@
         <p:spPr>
           <a:xfrm>
             <a:off x="8028431" y="1600200"/>
-            <a:ext cx="3566160" cy="2057400"/>
+            <a:ext cx="3566160" cy="2240280"/>
           </a:xfrm>
           <a:prstGeom prst="rect">
             <a:avLst/>
@@ -7345,7 +7436,7 @@
               </a:lnSpc>
             </a:pPr>
             <a:r>
-              <a:rPr sz="1400" b="1">
+              <a:rPr sz="1600" b="1">
                 <a:solidFill>
                   <a:srgbClr val="2E3B4E"/>
                 </a:solidFill>
@@ -7365,7 +7456,7 @@
               </a:spcBef>
             </a:pPr>
             <a:r>
-              <a:rPr sz="1200" b="0">
+              <a:rPr sz="1400" b="0">
                 <a:solidFill>
                   <a:srgbClr val="525F6F"/>
                 </a:solidFill>
@@ -7385,8 +7476,8 @@
         </p:nvSpPr>
         <p:spPr>
           <a:xfrm>
-            <a:off x="640080" y="3840480"/>
-            <a:ext cx="3566160" cy="2057400"/>
+            <a:off x="640080" y="4023360"/>
+            <a:ext cx="3566160" cy="2240280"/>
           </a:xfrm>
           <a:prstGeom prst="rect">
             <a:avLst/>
@@ -7425,7 +7516,7 @@
               </a:lnSpc>
             </a:pPr>
             <a:r>
-              <a:rPr sz="1400" b="1">
+              <a:rPr sz="1600" b="1">
                 <a:solidFill>
                   <a:srgbClr val="2E3B4E"/>
                 </a:solidFill>
@@ -7445,7 +7536,7 @@
               </a:spcBef>
             </a:pPr>
             <a:r>
-              <a:rPr sz="1200" b="0">
+              <a:rPr sz="1400" b="0">
                 <a:solidFill>
                   <a:srgbClr val="525F6F"/>
                 </a:solidFill>
@@ -7465,8 +7556,8 @@
         </p:nvSpPr>
         <p:spPr>
           <a:xfrm>
-            <a:off x="4334256" y="3840480"/>
-            <a:ext cx="3566160" cy="2057400"/>
+            <a:off x="4334256" y="4023360"/>
+            <a:ext cx="3566160" cy="2240280"/>
           </a:xfrm>
           <a:prstGeom prst="rect">
             <a:avLst/>
@@ -7505,7 +7596,7 @@
               </a:lnSpc>
             </a:pPr>
             <a:r>
-              <a:rPr sz="1400" b="1">
+              <a:rPr sz="1600" b="1">
                 <a:solidFill>
                   <a:srgbClr val="2E3B4E"/>
                 </a:solidFill>
@@ -7525,7 +7616,7 @@
               </a:spcBef>
             </a:pPr>
             <a:r>
-              <a:rPr sz="1200" b="0">
+              <a:rPr sz="1400" b="0">
                 <a:solidFill>
                   <a:srgbClr val="525F6F"/>
                 </a:solidFill>
@@ -7545,8 +7636,8 @@
         </p:nvSpPr>
         <p:spPr>
           <a:xfrm>
-            <a:off x="8028431" y="3840480"/>
-            <a:ext cx="3566160" cy="2057400"/>
+            <a:off x="8028431" y="4023360"/>
+            <a:ext cx="3566160" cy="2240280"/>
           </a:xfrm>
           <a:prstGeom prst="rect">
             <a:avLst/>
@@ -7585,7 +7676,7 @@
               </a:lnSpc>
             </a:pPr>
             <a:r>
-              <a:rPr sz="1400" b="1">
+              <a:rPr sz="1600" b="1">
                 <a:solidFill>
                   <a:srgbClr val="2E3B4E"/>
                 </a:solidFill>
@@ -7605,7 +7696,7 @@
               </a:spcBef>
             </a:pPr>
             <a:r>
-              <a:rPr sz="1200" b="0">
+              <a:rPr sz="1400" b="0">
                 <a:solidFill>
                   <a:srgbClr val="525F6F"/>
                 </a:solidFill>
@@ -7763,7 +7854,7 @@
         <p:spPr>
           <a:xfrm>
             <a:off x="640080" y="1600200"/>
-            <a:ext cx="3566160" cy="2057400"/>
+            <a:ext cx="3566160" cy="2240280"/>
           </a:xfrm>
           <a:prstGeom prst="rect">
             <a:avLst/>
@@ -7802,7 +7893,7 @@
               </a:lnSpc>
             </a:pPr>
             <a:r>
-              <a:rPr sz="1400" b="1">
+              <a:rPr sz="1600" b="1">
                 <a:solidFill>
                   <a:srgbClr val="2E3B4E"/>
                 </a:solidFill>
@@ -7822,7 +7913,7 @@
               </a:spcBef>
             </a:pPr>
             <a:r>
-              <a:rPr sz="1200" b="0">
+              <a:rPr sz="1400" b="0">
                 <a:solidFill>
                   <a:srgbClr val="525F6F"/>
                 </a:solidFill>
@@ -7843,7 +7934,7 @@
         <p:spPr>
           <a:xfrm>
             <a:off x="4334256" y="1600200"/>
-            <a:ext cx="3566160" cy="2057400"/>
+            <a:ext cx="3566160" cy="2240280"/>
           </a:xfrm>
           <a:prstGeom prst="rect">
             <a:avLst/>
@@ -7882,7 +7973,7 @@
               </a:lnSpc>
             </a:pPr>
             <a:r>
-              <a:rPr sz="1400" b="1">
+              <a:rPr sz="1600" b="1">
                 <a:solidFill>
                   <a:srgbClr val="2E3B4E"/>
                 </a:solidFill>
@@ -7902,7 +7993,7 @@
               </a:spcBef>
             </a:pPr>
             <a:r>
-              <a:rPr sz="1200" b="0">
+              <a:rPr sz="1400" b="0">
                 <a:solidFill>
                   <a:srgbClr val="525F6F"/>
                 </a:solidFill>
@@ -7923,7 +8014,7 @@
         <p:spPr>
           <a:xfrm>
             <a:off x="8028431" y="1600200"/>
-            <a:ext cx="3566160" cy="2057400"/>
+            <a:ext cx="3566160" cy="2240280"/>
           </a:xfrm>
           <a:prstGeom prst="rect">
             <a:avLst/>
@@ -7962,7 +8053,7 @@
               </a:lnSpc>
             </a:pPr>
             <a:r>
-              <a:rPr sz="1400" b="1">
+              <a:rPr sz="1600" b="1">
                 <a:solidFill>
                   <a:srgbClr val="2E3B4E"/>
                 </a:solidFill>
@@ -7982,7 +8073,7 @@
               </a:spcBef>
             </a:pPr>
             <a:r>
-              <a:rPr sz="1200" b="0">
+              <a:rPr sz="1400" b="0">
                 <a:solidFill>
                   <a:srgbClr val="525F6F"/>
                 </a:solidFill>
@@ -8002,8 +8093,8 @@
         </p:nvSpPr>
         <p:spPr>
           <a:xfrm>
-            <a:off x="640080" y="3840480"/>
-            <a:ext cx="3566160" cy="2057400"/>
+            <a:off x="640080" y="4023360"/>
+            <a:ext cx="3566160" cy="2240280"/>
           </a:xfrm>
           <a:prstGeom prst="rect">
             <a:avLst/>
@@ -8042,7 +8133,7 @@
               </a:lnSpc>
             </a:pPr>
             <a:r>
-              <a:rPr sz="1400" b="1">
+              <a:rPr sz="1600" b="1">
                 <a:solidFill>
                   <a:srgbClr val="2E3B4E"/>
                 </a:solidFill>
@@ -8062,7 +8153,7 @@
               </a:spcBef>
             </a:pPr>
             <a:r>
-              <a:rPr sz="1200" b="0">
+              <a:rPr sz="1400" b="0">
                 <a:solidFill>
                   <a:srgbClr val="525F6F"/>
                 </a:solidFill>
@@ -8082,8 +8173,8 @@
         </p:nvSpPr>
         <p:spPr>
           <a:xfrm>
-            <a:off x="4334256" y="3840480"/>
-            <a:ext cx="3566160" cy="2057400"/>
+            <a:off x="4334256" y="4023360"/>
+            <a:ext cx="3566160" cy="2240280"/>
           </a:xfrm>
           <a:prstGeom prst="rect">
             <a:avLst/>
@@ -8122,7 +8213,7 @@
               </a:lnSpc>
             </a:pPr>
             <a:r>
-              <a:rPr sz="1400" b="1">
+              <a:rPr sz="1600" b="1">
                 <a:solidFill>
                   <a:srgbClr val="2E3B4E"/>
                 </a:solidFill>
@@ -8142,7 +8233,7 @@
               </a:spcBef>
             </a:pPr>
             <a:r>
-              <a:rPr sz="1200" b="0">
+              <a:rPr sz="1400" b="0">
                 <a:solidFill>
                   <a:srgbClr val="525F6F"/>
                 </a:solidFill>
@@ -8162,8 +8253,8 @@
         </p:nvSpPr>
         <p:spPr>
           <a:xfrm>
-            <a:off x="8028431" y="3840480"/>
-            <a:ext cx="3566160" cy="2057400"/>
+            <a:off x="8028431" y="4023360"/>
+            <a:ext cx="3566160" cy="2240280"/>
           </a:xfrm>
           <a:prstGeom prst="rect">
             <a:avLst/>
@@ -8202,7 +8293,7 @@
               </a:lnSpc>
             </a:pPr>
             <a:r>
-              <a:rPr sz="1400" b="1">
+              <a:rPr sz="1600" b="1">
                 <a:solidFill>
                   <a:srgbClr val="2E3B4E"/>
                 </a:solidFill>
@@ -8222,7 +8313,7 @@
               </a:spcBef>
             </a:pPr>
             <a:r>
-              <a:rPr sz="1200" b="0">
+              <a:rPr sz="1400" b="0">
                 <a:solidFill>
                   <a:srgbClr val="525F6F"/>
                 </a:solidFill>
@@ -8379,8 +8470,8 @@
         </p:nvSpPr>
         <p:spPr>
           <a:xfrm>
-            <a:off x="640080" y="2148840"/>
-            <a:ext cx="1975104" cy="1005840"/>
+            <a:off x="640080" y="1965960"/>
+            <a:ext cx="2011680" cy="1417320"/>
           </a:xfrm>
           <a:prstGeom prst="roundRect">
             <a:avLst>
@@ -8419,7 +8510,7 @@
               </a:lnSpc>
             </a:pPr>
             <a:r>
-              <a:rPr sz="1400" b="1">
+              <a:rPr sz="1600" b="1">
                 <a:solidFill>
                   <a:srgbClr val="FFFFFF"/>
                 </a:solidFill>
@@ -8439,8 +8530,8 @@
         </p:nvSpPr>
         <p:spPr>
           <a:xfrm>
-            <a:off x="548640" y="3300984"/>
-            <a:ext cx="2157984" cy="914400"/>
+            <a:off x="484631" y="3566160"/>
+            <a:ext cx="2322576" cy="914400"/>
           </a:xfrm>
           <a:prstGeom prst="rect">
             <a:avLst/>
@@ -8455,11 +8546,11 @@
           <a:p>
             <a:pPr algn="ctr">
               <a:lnSpc>
-                <a:spcPct val="130000"/>
-              </a:lnSpc>
-            </a:pPr>
-            <a:r>
-              <a:rPr sz="1200" b="0">
+                <a:spcPct val="140000"/>
+              </a:lnSpc>
+            </a:pPr>
+            <a:r>
+              <a:rPr sz="1400" b="0">
                 <a:solidFill>
                   <a:srgbClr val="595959"/>
                 </a:solidFill>
@@ -8479,8 +8570,8 @@
         </p:nvCxnSpPr>
         <p:spPr>
           <a:xfrm>
-            <a:off x="2596896" y="2651760"/>
-            <a:ext cx="402336" cy="0"/>
+            <a:off x="2633472" y="2674620"/>
+            <a:ext cx="365760" cy="0"/>
           </a:xfrm>
           <a:prstGeom prst="line">
             <a:avLst/>
@@ -8514,7 +8605,7 @@
         </p:nvSpPr>
         <p:spPr>
           <a:xfrm rot="5400000">
-            <a:off x="2944368" y="2587752"/>
+            <a:off x="2944368" y="2610612"/>
             <a:ext cx="128016" cy="128016"/>
           </a:xfrm>
           <a:prstGeom prst="triangle">
@@ -8558,8 +8649,8 @@
         </p:nvSpPr>
         <p:spPr>
           <a:xfrm>
-            <a:off x="2962656" y="2148840"/>
-            <a:ext cx="1975104" cy="1005840"/>
+            <a:off x="2962656" y="1965960"/>
+            <a:ext cx="2011680" cy="1417320"/>
           </a:xfrm>
           <a:prstGeom prst="roundRect">
             <a:avLst>
@@ -8598,7 +8689,7 @@
               </a:lnSpc>
             </a:pPr>
             <a:r>
-              <a:rPr sz="1400" b="1">
+              <a:rPr sz="1600" b="1">
                 <a:solidFill>
                   <a:srgbClr val="FFFFFF"/>
                 </a:solidFill>
@@ -8618,8 +8709,8 @@
         </p:nvSpPr>
         <p:spPr>
           <a:xfrm>
-            <a:off x="2871216" y="3300984"/>
-            <a:ext cx="2157984" cy="914400"/>
+            <a:off x="2807208" y="3566160"/>
+            <a:ext cx="2322576" cy="914400"/>
           </a:xfrm>
           <a:prstGeom prst="rect">
             <a:avLst/>
@@ -8634,11 +8725,11 @@
           <a:p>
             <a:pPr algn="ctr">
               <a:lnSpc>
-                <a:spcPct val="130000"/>
-              </a:lnSpc>
-            </a:pPr>
-            <a:r>
-              <a:rPr sz="1200" b="0">
+                <a:spcPct val="140000"/>
+              </a:lnSpc>
+            </a:pPr>
+            <a:r>
+              <a:rPr sz="1400" b="0">
                 <a:solidFill>
                   <a:srgbClr val="595959"/>
                 </a:solidFill>
@@ -8658,8 +8749,8 @@
         </p:nvCxnSpPr>
         <p:spPr>
           <a:xfrm>
-            <a:off x="4919472" y="2651760"/>
-            <a:ext cx="402336" cy="0"/>
+            <a:off x="4956048" y="2674620"/>
+            <a:ext cx="365760" cy="0"/>
           </a:xfrm>
           <a:prstGeom prst="line">
             <a:avLst/>
@@ -8693,7 +8784,7 @@
         </p:nvSpPr>
         <p:spPr>
           <a:xfrm rot="5400000">
-            <a:off x="5266944" y="2587752"/>
+            <a:off x="5266944" y="2610612"/>
             <a:ext cx="128016" cy="128016"/>
           </a:xfrm>
           <a:prstGeom prst="triangle">
@@ -8737,8 +8828,8 @@
         </p:nvSpPr>
         <p:spPr>
           <a:xfrm>
-            <a:off x="5285232" y="2148840"/>
-            <a:ext cx="1975104" cy="1005840"/>
+            <a:off x="5285232" y="1965960"/>
+            <a:ext cx="2011680" cy="1417320"/>
           </a:xfrm>
           <a:prstGeom prst="roundRect">
             <a:avLst>
@@ -8777,7 +8868,7 @@
               </a:lnSpc>
             </a:pPr>
             <a:r>
-              <a:rPr sz="1400" b="1">
+              <a:rPr sz="1600" b="1">
                 <a:solidFill>
                   <a:srgbClr val="FFFFFF"/>
                 </a:solidFill>
@@ -8797,8 +8888,8 @@
         </p:nvSpPr>
         <p:spPr>
           <a:xfrm>
-            <a:off x="5193792" y="3300984"/>
-            <a:ext cx="2157984" cy="914400"/>
+            <a:off x="5129784" y="3566160"/>
+            <a:ext cx="2322576" cy="914400"/>
           </a:xfrm>
           <a:prstGeom prst="rect">
             <a:avLst/>
@@ -8813,11 +8904,11 @@
           <a:p>
             <a:pPr algn="ctr">
               <a:lnSpc>
-                <a:spcPct val="130000"/>
-              </a:lnSpc>
-            </a:pPr>
-            <a:r>
-              <a:rPr sz="1200" b="0">
+                <a:spcPct val="140000"/>
+              </a:lnSpc>
+            </a:pPr>
+            <a:r>
+              <a:rPr sz="1400" b="0">
                 <a:solidFill>
                   <a:srgbClr val="595959"/>
                 </a:solidFill>
@@ -8837,8 +8928,8 @@
         </p:nvCxnSpPr>
         <p:spPr>
           <a:xfrm>
-            <a:off x="7242048" y="2651760"/>
-            <a:ext cx="402336" cy="0"/>
+            <a:off x="7278624" y="2674620"/>
+            <a:ext cx="365760" cy="0"/>
           </a:xfrm>
           <a:prstGeom prst="line">
             <a:avLst/>
@@ -8872,7 +8963,7 @@
         </p:nvSpPr>
         <p:spPr>
           <a:xfrm rot="5400000">
-            <a:off x="7589520" y="2587752"/>
+            <a:off x="7589520" y="2610612"/>
             <a:ext cx="128016" cy="128016"/>
           </a:xfrm>
           <a:prstGeom prst="triangle">
@@ -8916,8 +9007,8 @@
         </p:nvSpPr>
         <p:spPr>
           <a:xfrm>
-            <a:off x="7607808" y="2148840"/>
-            <a:ext cx="1975104" cy="1005840"/>
+            <a:off x="7607808" y="1965960"/>
+            <a:ext cx="2011680" cy="1417320"/>
           </a:xfrm>
           <a:prstGeom prst="roundRect">
             <a:avLst>
@@ -8956,7 +9047,7 @@
               </a:lnSpc>
             </a:pPr>
             <a:r>
-              <a:rPr sz="1400" b="1">
+              <a:rPr sz="1600" b="1">
                 <a:solidFill>
                   <a:srgbClr val="FFFFFF"/>
                 </a:solidFill>
@@ -8976,8 +9067,8 @@
         </p:nvSpPr>
         <p:spPr>
           <a:xfrm>
-            <a:off x="7516368" y="3300984"/>
-            <a:ext cx="2157984" cy="914400"/>
+            <a:off x="7452360" y="3566160"/>
+            <a:ext cx="2322576" cy="914400"/>
           </a:xfrm>
           <a:prstGeom prst="rect">
             <a:avLst/>
@@ -8992,11 +9083,11 @@
           <a:p>
             <a:pPr algn="ctr">
               <a:lnSpc>
-                <a:spcPct val="130000"/>
-              </a:lnSpc>
-            </a:pPr>
-            <a:r>
-              <a:rPr sz="1200" b="0">
+                <a:spcPct val="140000"/>
+              </a:lnSpc>
+            </a:pPr>
+            <a:r>
+              <a:rPr sz="1400" b="0">
                 <a:solidFill>
                   <a:srgbClr val="595959"/>
                 </a:solidFill>
@@ -9016,8 +9107,8 @@
         </p:nvCxnSpPr>
         <p:spPr>
           <a:xfrm>
-            <a:off x="9564624" y="2651760"/>
-            <a:ext cx="402336" cy="0"/>
+            <a:off x="9601200" y="2674620"/>
+            <a:ext cx="365760" cy="0"/>
           </a:xfrm>
           <a:prstGeom prst="line">
             <a:avLst/>
@@ -9051,7 +9142,7 @@
         </p:nvSpPr>
         <p:spPr>
           <a:xfrm rot="5400000">
-            <a:off x="9912096" y="2587752"/>
+            <a:off x="9912096" y="2610612"/>
             <a:ext cx="128016" cy="128016"/>
           </a:xfrm>
           <a:prstGeom prst="triangle">
@@ -9095,8 +9186,8 @@
         </p:nvSpPr>
         <p:spPr>
           <a:xfrm>
-            <a:off x="9930384" y="2148840"/>
-            <a:ext cx="1975104" cy="1005840"/>
+            <a:off x="9930384" y="1965960"/>
+            <a:ext cx="2011680" cy="1417320"/>
           </a:xfrm>
           <a:prstGeom prst="roundRect">
             <a:avLst>
@@ -9135,7 +9226,7 @@
               </a:lnSpc>
             </a:pPr>
             <a:r>
-              <a:rPr sz="1400" b="1">
+              <a:rPr sz="1600" b="1">
                 <a:solidFill>
                   <a:srgbClr val="FFFFFF"/>
                 </a:solidFill>
@@ -9155,8 +9246,8 @@
         </p:nvSpPr>
         <p:spPr>
           <a:xfrm>
-            <a:off x="9838944" y="3300984"/>
-            <a:ext cx="2157984" cy="914400"/>
+            <a:off x="9774936" y="3566160"/>
+            <a:ext cx="2322576" cy="914400"/>
           </a:xfrm>
           <a:prstGeom prst="rect">
             <a:avLst/>
@@ -9171,11 +9262,11 @@
           <a:p>
             <a:pPr algn="ctr">
               <a:lnSpc>
-                <a:spcPct val="130000"/>
-              </a:lnSpc>
-            </a:pPr>
-            <a:r>
-              <a:rPr sz="1200" b="0">
+                <a:spcPct val="140000"/>
+              </a:lnSpc>
+            </a:pPr>
+            <a:r>
+              <a:rPr sz="1400" b="0">
                 <a:solidFill>
                   <a:srgbClr val="595959"/>
                 </a:solidFill>
@@ -9189,14 +9280,74 @@
       </p:sp>
       <p:sp>
         <p:nvSpPr>
-          <p:cNvPr id="23" name="TextBox 22"/>
+          <p:cNvPr id="23" name="Rectangle 22"/>
+          <p:cNvSpPr/>
+          <p:nvPr/>
+        </p:nvSpPr>
+        <p:spPr>
+          <a:xfrm>
+            <a:off x="640080" y="4617720"/>
+            <a:ext cx="10972800" cy="1417320"/>
+          </a:xfrm>
+          <a:prstGeom prst="rect">
+            <a:avLst/>
+          </a:prstGeom>
+          <a:solidFill>
+            <a:srgbClr val="E7F1FA"/>
+          </a:solidFill>
+          <a:ln w="9525">
+            <a:solidFill>
+              <a:srgbClr val="FFFFFF"/>
+            </a:solidFill>
+          </a:ln>
+          <a:effectLst/>
+        </p:spPr>
+        <p:style>
+          <a:lnRef idx="1">
+            <a:schemeClr val="accent1"/>
+          </a:lnRef>
+          <a:fillRef idx="3">
+            <a:schemeClr val="accent1"/>
+          </a:fillRef>
+          <a:effectRef idx="2">
+            <a:schemeClr val="accent1"/>
+          </a:effectRef>
+          <a:fontRef idx="minor">
+            <a:schemeClr val="lt1"/>
+          </a:fontRef>
+        </p:style>
+        <p:txBody>
+          <a:bodyPr rtlCol="0" anchor="t" wrap="square" lIns="164592" rIns="164592" tIns="54864" bIns="54864"/>
+          <a:lstStyle/>
+          <a:p>
+            <a:pPr algn="l">
+              <a:lnSpc>
+                <a:spcPct val="100000"/>
+              </a:lnSpc>
+            </a:pPr>
+            <a:r>
+              <a:rPr sz="1600" b="1">
+                <a:solidFill>
+                  <a:srgbClr val="2E3B4E"/>
+                </a:solidFill>
+                <a:latin typeface="Times New Roman"/>
+                <a:ea typeface="宋体"/>
+              </a:rPr>
+              <a:t>操作小贴士</a:t>
+            </a:r>
+          </a:p>
+        </p:txBody>
+      </p:sp>
+      <p:sp>
+        <p:nvSpPr>
+          <p:cNvPr id="24" name="TextBox 23"/>
           <p:cNvSpPr txBox="1"/>
           <p:nvPr/>
         </p:nvSpPr>
         <p:spPr>
           <a:xfrm>
-            <a:off x="640080" y="5212080"/>
-            <a:ext cx="10972800" cy="365760"/>
+            <a:off x="868680" y="5138928"/>
+            <a:ext cx="10515600" cy="822960"/>
           </a:xfrm>
           <a:prstGeom prst="rect">
             <a:avLst/>
@@ -9211,25 +9362,59 @@
           <a:p>
             <a:pPr algn="l">
               <a:lnSpc>
-                <a:spcPct val="100000"/>
-              </a:lnSpc>
-            </a:pPr>
-            <a:r>
-              <a:rPr sz="1200" b="0">
-                <a:solidFill>
-                  <a:srgbClr val="595959"/>
-                </a:solidFill>
-                <a:latin typeface="Times New Roman"/>
-                <a:ea typeface="宋体"/>
-              </a:rPr>
-              <a:t>提示：日志文件筛选框会自动填充与制程匹配的内容，有特殊需求也可手动输入。</a:t>
-            </a:r>
-          </a:p>
-        </p:txBody>
-      </p:sp>
-      <p:sp>
-        <p:nvSpPr>
-          <p:cNvPr id="24" name="TextBox 23"/>
+                <a:spcPct val="150000"/>
+              </a:lnSpc>
+            </a:pPr>
+            <a:r>
+              <a:rPr sz="1400" b="0">
+                <a:solidFill>
+                  <a:srgbClr val="525F6F"/>
+                </a:solidFill>
+                <a:latin typeface="Times New Roman"/>
+                <a:ea typeface="宋体"/>
+              </a:rPr>
+              <a:t>· 日志文件筛选框会自动填充与制程匹配的内容，有特殊需求可手动输入</a:t>
+            </a:r>
+          </a:p>
+          <a:p>
+            <a:pPr algn="l">
+              <a:lnSpc>
+                <a:spcPct val="150000"/>
+              </a:lnSpc>
+            </a:pPr>
+            <a:r>
+              <a:rPr sz="1400" b="0">
+                <a:solidFill>
+                  <a:srgbClr val="525F6F"/>
+                </a:solidFill>
+                <a:latin typeface="Times New Roman"/>
+                <a:ea typeface="宋体"/>
+              </a:rPr>
+              <a:t>· 制程模板会自动预填 UPH 触发词、报警关键词、制程名称（原因清单）</a:t>
+            </a:r>
+          </a:p>
+          <a:p>
+            <a:pPr algn="l">
+              <a:lnSpc>
+                <a:spcPct val="150000"/>
+              </a:lnSpc>
+            </a:pPr>
+            <a:r>
+              <a:rPr sz="1400" b="0">
+                <a:solidFill>
+                  <a:srgbClr val="525F6F"/>
+                </a:solidFill>
+                <a:latin typeface="Times New Roman"/>
+                <a:ea typeface="宋体"/>
+              </a:rPr>
+              <a:t>· 一键分析 = 合并拆分 + UPH + EFF + 报警 + 机台状态，一次全部完成</a:t>
+            </a:r>
+          </a:p>
+        </p:txBody>
+      </p:sp>
+      <p:sp>
+        <p:nvSpPr>
+          <p:cNvPr id="25" name="TextBox 24"/>
           <p:cNvSpPr txBox="1"/>
           <p:nvPr/>
         </p:nvSpPr>
@@ -9373,7 +9558,7 @@
         <p:spPr>
           <a:xfrm>
             <a:off x="640080" y="1463040"/>
-            <a:ext cx="10972800" cy="365760"/>
+            <a:ext cx="10972800" cy="411480"/>
           </a:xfrm>
           <a:prstGeom prst="rect">
             <a:avLst/>
@@ -9392,7 +9577,7 @@
               </a:lnSpc>
             </a:pPr>
             <a:r>
-              <a:rPr sz="1200" b="0">
+              <a:rPr sz="1400" b="0">
                 <a:solidFill>
                   <a:srgbClr val="595959"/>
                 </a:solidFill>
@@ -9450,7 +9635,7 @@
               </a:lnSpc>
             </a:pPr>
             <a:r>
-              <a:rPr sz="1400" b="1">
+              <a:rPr sz="1600" b="1">
                 <a:solidFill>
                   <a:srgbClr val="EF5149"/>
                 </a:solidFill>
@@ -9471,7 +9656,7 @@
         <p:spPr>
           <a:xfrm>
             <a:off x="841248" y="2423160"/>
-            <a:ext cx="2377440" cy="365760"/>
+            <a:ext cx="2377440" cy="411480"/>
           </a:xfrm>
           <a:prstGeom prst="rect">
             <a:avLst/>
@@ -9490,7 +9675,7 @@
               </a:lnSpc>
             </a:pPr>
             <a:r>
-              <a:rPr sz="1200" b="0">
+              <a:rPr sz="1400" b="0">
                 <a:solidFill>
                   <a:srgbClr val="595959"/>
                 </a:solidFill>
@@ -9511,7 +9696,7 @@
         <p:spPr>
           <a:xfrm>
             <a:off x="841248" y="2953512"/>
-            <a:ext cx="2377440" cy="365760"/>
+            <a:ext cx="2377440" cy="411480"/>
           </a:xfrm>
           <a:prstGeom prst="rect">
             <a:avLst/>
@@ -9530,7 +9715,7 @@
               </a:lnSpc>
             </a:pPr>
             <a:r>
-              <a:rPr sz="1200" b="0">
+              <a:rPr sz="1400" b="0">
                 <a:solidFill>
                   <a:srgbClr val="595959"/>
                 </a:solidFill>
@@ -9551,7 +9736,7 @@
         <p:spPr>
           <a:xfrm>
             <a:off x="841248" y="3483863"/>
-            <a:ext cx="2377440" cy="365760"/>
+            <a:ext cx="2377440" cy="411480"/>
           </a:xfrm>
           <a:prstGeom prst="rect">
             <a:avLst/>
@@ -9570,7 +9755,7 @@
               </a:lnSpc>
             </a:pPr>
             <a:r>
-              <a:rPr sz="1200" b="0">
+              <a:rPr sz="1400" b="0">
                 <a:solidFill>
                   <a:srgbClr val="595959"/>
                 </a:solidFill>
@@ -9591,7 +9776,7 @@
         <p:spPr>
           <a:xfrm>
             <a:off x="841248" y="4014215"/>
-            <a:ext cx="2377440" cy="365760"/>
+            <a:ext cx="2377440" cy="411480"/>
           </a:xfrm>
           <a:prstGeom prst="rect">
             <a:avLst/>
@@ -9610,7 +9795,7 @@
               </a:lnSpc>
             </a:pPr>
             <a:r>
-              <a:rPr sz="1200" b="0">
+              <a:rPr sz="1400" b="0">
                 <a:solidFill>
                   <a:srgbClr val="595959"/>
                 </a:solidFill>
@@ -9631,7 +9816,7 @@
         <p:spPr>
           <a:xfrm>
             <a:off x="841248" y="4544568"/>
-            <a:ext cx="2377440" cy="365760"/>
+            <a:ext cx="2377440" cy="411480"/>
           </a:xfrm>
           <a:prstGeom prst="rect">
             <a:avLst/>
@@ -9650,7 +9835,7 @@
               </a:lnSpc>
             </a:pPr>
             <a:r>
-              <a:rPr sz="1200" b="0">
+              <a:rPr sz="1400" b="0">
                 <a:solidFill>
                   <a:srgbClr val="595959"/>
                 </a:solidFill>
@@ -9671,7 +9856,7 @@
         <p:spPr>
           <a:xfrm>
             <a:off x="841248" y="5074920"/>
-            <a:ext cx="2377440" cy="365760"/>
+            <a:ext cx="2377440" cy="411480"/>
           </a:xfrm>
           <a:prstGeom prst="rect">
             <a:avLst/>
@@ -9690,7 +9875,7 @@
               </a:lnSpc>
             </a:pPr>
             <a:r>
-              <a:rPr sz="1200" b="0">
+              <a:rPr sz="1400" b="0">
                 <a:solidFill>
                   <a:srgbClr val="595959"/>
                 </a:solidFill>
@@ -9748,7 +9933,7 @@
               </a:lnSpc>
             </a:pPr>
             <a:r>
-              <a:rPr sz="1400" b="1">
+              <a:rPr sz="1600" b="1">
                 <a:solidFill>
                   <a:srgbClr val="083C63"/>
                 </a:solidFill>
@@ -9769,7 +9954,7 @@
         <p:spPr>
           <a:xfrm>
             <a:off x="3730752" y="2487168"/>
-            <a:ext cx="7680960" cy="365760"/>
+            <a:ext cx="7680960" cy="411480"/>
           </a:xfrm>
           <a:prstGeom prst="rect">
             <a:avLst/>
@@ -9788,7 +9973,7 @@
               </a:lnSpc>
             </a:pPr>
             <a:r>
-              <a:rPr sz="1200" b="0">
+              <a:rPr sz="1400" b="0">
                 <a:solidFill>
                   <a:srgbClr val="262626"/>
                 </a:solidFill>
@@ -9809,7 +9994,7 @@
         <p:spPr>
           <a:xfrm>
             <a:off x="3730752" y="2944368"/>
-            <a:ext cx="7680960" cy="365760"/>
+            <a:ext cx="7680960" cy="411480"/>
           </a:xfrm>
           <a:prstGeom prst="rect">
             <a:avLst/>
@@ -9828,7 +10013,7 @@
               </a:lnSpc>
             </a:pPr>
             <a:r>
-              <a:rPr sz="1200" b="0">
+              <a:rPr sz="1400" b="0">
                 <a:solidFill>
                   <a:srgbClr val="262626"/>
                 </a:solidFill>
@@ -9849,7 +10034,7 @@
         <p:spPr>
           <a:xfrm>
             <a:off x="3730752" y="3401568"/>
-            <a:ext cx="7680960" cy="365760"/>
+            <a:ext cx="7680960" cy="411480"/>
           </a:xfrm>
           <a:prstGeom prst="rect">
             <a:avLst/>
@@ -9868,7 +10053,7 @@
               </a:lnSpc>
             </a:pPr>
             <a:r>
-              <a:rPr sz="1200" b="0">
+              <a:rPr sz="1400" b="0">
                 <a:solidFill>
                   <a:srgbClr val="262626"/>
                 </a:solidFill>
@@ -9928,7 +10113,7 @@
               </a:lnSpc>
             </a:pPr>
             <a:r>
-              <a:rPr sz="1400" b="1">
+              <a:rPr sz="1600" b="1">
                 <a:solidFill>
                   <a:srgbClr val="083C63"/>
                 </a:solidFill>
@@ -9968,7 +10153,7 @@
               </a:lnSpc>
             </a:pPr>
             <a:r>
-              <a:rPr sz="1200" b="0">
+              <a:rPr sz="1400" b="0">
                 <a:solidFill>
                   <a:srgbClr val="595959"/>
                 </a:solidFill>
@@ -10998,8 +11183,8 @@
         </p:nvSpPr>
         <p:spPr>
           <a:xfrm>
-            <a:off x="640080" y="1554480"/>
-            <a:ext cx="10972800" cy="384048"/>
+            <a:off x="640080" y="1417320"/>
+            <a:ext cx="6309360" cy="457200"/>
           </a:xfrm>
           <a:prstGeom prst="rect">
             <a:avLst/>
@@ -11018,7 +11203,7 @@
               </a:lnSpc>
             </a:pPr>
             <a:r>
-              <a:rPr sz="1400" b="1">
+              <a:rPr sz="1600" b="1">
                 <a:solidFill>
                   <a:srgbClr val="083C63"/>
                 </a:solidFill>
@@ -11038,8 +11223,8 @@
         </p:nvSpPr>
         <p:spPr>
           <a:xfrm>
-            <a:off x="640080" y="1938528"/>
-            <a:ext cx="10972800" cy="329184"/>
+            <a:off x="640080" y="1837944"/>
+            <a:ext cx="6309360" cy="502920"/>
           </a:xfrm>
           <a:prstGeom prst="rect">
             <a:avLst/>
@@ -11054,11 +11239,11 @@
           <a:p>
             <a:pPr algn="l">
               <a:lnSpc>
-                <a:spcPct val="100000"/>
-              </a:lnSpc>
-            </a:pPr>
-            <a:r>
-              <a:rPr sz="1200" b="0">
+                <a:spcPct val="130000"/>
+              </a:lnSpc>
+            </a:pPr>
+            <a:r>
+              <a:rPr sz="1400" b="0">
                 <a:solidFill>
                   <a:srgbClr val="595959"/>
                 </a:solidFill>
@@ -11078,8 +11263,8 @@
         </p:nvCxnSpPr>
         <p:spPr>
           <a:xfrm>
-            <a:off x="640080" y="2359152"/>
-            <a:ext cx="10972800" cy="0"/>
+            <a:off x="640080" y="2331720"/>
+            <a:ext cx="6309360" cy="0"/>
           </a:xfrm>
           <a:prstGeom prst="line">
             <a:avLst/>
@@ -11113,8 +11298,8 @@
         </p:nvSpPr>
         <p:spPr>
           <a:xfrm>
-            <a:off x="640080" y="2468880"/>
-            <a:ext cx="10972800" cy="384048"/>
+            <a:off x="640080" y="2404872"/>
+            <a:ext cx="6309360" cy="457200"/>
           </a:xfrm>
           <a:prstGeom prst="rect">
             <a:avLst/>
@@ -11133,7 +11318,7 @@
               </a:lnSpc>
             </a:pPr>
             <a:r>
-              <a:rPr sz="1400" b="1">
+              <a:rPr sz="1600" b="1">
                 <a:solidFill>
                   <a:srgbClr val="083C63"/>
                 </a:solidFill>
@@ -11153,8 +11338,8 @@
         </p:nvSpPr>
         <p:spPr>
           <a:xfrm>
-            <a:off x="640080" y="2852928"/>
-            <a:ext cx="10972800" cy="329184"/>
+            <a:off x="640080" y="2825496"/>
+            <a:ext cx="6309360" cy="502920"/>
           </a:xfrm>
           <a:prstGeom prst="rect">
             <a:avLst/>
@@ -11169,11 +11354,11 @@
           <a:p>
             <a:pPr algn="l">
               <a:lnSpc>
-                <a:spcPct val="100000"/>
-              </a:lnSpc>
-            </a:pPr>
-            <a:r>
-              <a:rPr sz="1200" b="0">
+                <a:spcPct val="130000"/>
+              </a:lnSpc>
+            </a:pPr>
+            <a:r>
+              <a:rPr sz="1400" b="0">
                 <a:solidFill>
                   <a:srgbClr val="595959"/>
                 </a:solidFill>
@@ -11193,8 +11378,8 @@
         </p:nvCxnSpPr>
         <p:spPr>
           <a:xfrm>
-            <a:off x="640080" y="3273552"/>
-            <a:ext cx="10972800" cy="0"/>
+            <a:off x="640080" y="3319272"/>
+            <a:ext cx="6309360" cy="0"/>
           </a:xfrm>
           <a:prstGeom prst="line">
             <a:avLst/>
@@ -11228,8 +11413,8 @@
         </p:nvSpPr>
         <p:spPr>
           <a:xfrm>
-            <a:off x="640080" y="3383280"/>
-            <a:ext cx="10972800" cy="384048"/>
+            <a:off x="640080" y="3392424"/>
+            <a:ext cx="6309360" cy="457200"/>
           </a:xfrm>
           <a:prstGeom prst="rect">
             <a:avLst/>
@@ -11248,7 +11433,7 @@
               </a:lnSpc>
             </a:pPr>
             <a:r>
-              <a:rPr sz="1400" b="1">
+              <a:rPr sz="1600" b="1">
                 <a:solidFill>
                   <a:srgbClr val="083C63"/>
                 </a:solidFill>
@@ -11268,8 +11453,8 @@
         </p:nvSpPr>
         <p:spPr>
           <a:xfrm>
-            <a:off x="640080" y="3767328"/>
-            <a:ext cx="10972800" cy="329184"/>
+            <a:off x="640080" y="3813048"/>
+            <a:ext cx="6309360" cy="502920"/>
           </a:xfrm>
           <a:prstGeom prst="rect">
             <a:avLst/>
@@ -11284,11 +11469,11 @@
           <a:p>
             <a:pPr algn="l">
               <a:lnSpc>
-                <a:spcPct val="100000"/>
-              </a:lnSpc>
-            </a:pPr>
-            <a:r>
-              <a:rPr sz="1200" b="0">
+                <a:spcPct val="130000"/>
+              </a:lnSpc>
+            </a:pPr>
+            <a:r>
+              <a:rPr sz="1400" b="0">
                 <a:solidFill>
                   <a:srgbClr val="595959"/>
                 </a:solidFill>
@@ -11308,8 +11493,8 @@
         </p:nvCxnSpPr>
         <p:spPr>
           <a:xfrm>
-            <a:off x="640080" y="4187952"/>
-            <a:ext cx="10972800" cy="0"/>
+            <a:off x="640080" y="4306824"/>
+            <a:ext cx="6309360" cy="0"/>
           </a:xfrm>
           <a:prstGeom prst="line">
             <a:avLst/>
@@ -11343,8 +11528,8 @@
         </p:nvSpPr>
         <p:spPr>
           <a:xfrm>
-            <a:off x="640080" y="4297680"/>
-            <a:ext cx="10972800" cy="384048"/>
+            <a:off x="640080" y="4379976"/>
+            <a:ext cx="6309360" cy="457200"/>
           </a:xfrm>
           <a:prstGeom prst="rect">
             <a:avLst/>
@@ -11363,7 +11548,7 @@
               </a:lnSpc>
             </a:pPr>
             <a:r>
-              <a:rPr sz="1400" b="1">
+              <a:rPr sz="1600" b="1">
                 <a:solidFill>
                   <a:srgbClr val="083C63"/>
                 </a:solidFill>
@@ -11383,8 +11568,8 @@
         </p:nvSpPr>
         <p:spPr>
           <a:xfrm>
-            <a:off x="640080" y="4681728"/>
-            <a:ext cx="10972800" cy="329184"/>
+            <a:off x="640080" y="4800600"/>
+            <a:ext cx="6309360" cy="502920"/>
           </a:xfrm>
           <a:prstGeom prst="rect">
             <a:avLst/>
@@ -11399,11 +11584,11 @@
           <a:p>
             <a:pPr algn="l">
               <a:lnSpc>
-                <a:spcPct val="100000"/>
-              </a:lnSpc>
-            </a:pPr>
-            <a:r>
-              <a:rPr sz="1200" b="0">
+                <a:spcPct val="130000"/>
+              </a:lnSpc>
+            </a:pPr>
+            <a:r>
+              <a:rPr sz="1400" b="0">
                 <a:solidFill>
                   <a:srgbClr val="595959"/>
                 </a:solidFill>
@@ -11423,8 +11608,8 @@
         </p:nvCxnSpPr>
         <p:spPr>
           <a:xfrm>
-            <a:off x="640080" y="5102352"/>
-            <a:ext cx="10972800" cy="0"/>
+            <a:off x="640080" y="5294376"/>
+            <a:ext cx="6309360" cy="0"/>
           </a:xfrm>
           <a:prstGeom prst="line">
             <a:avLst/>
@@ -11458,8 +11643,8 @@
         </p:nvSpPr>
         <p:spPr>
           <a:xfrm>
-            <a:off x="640080" y="5212080"/>
-            <a:ext cx="10972800" cy="384048"/>
+            <a:off x="640080" y="5367528"/>
+            <a:ext cx="6309360" cy="457200"/>
           </a:xfrm>
           <a:prstGeom prst="rect">
             <a:avLst/>
@@ -11478,7 +11663,7 @@
               </a:lnSpc>
             </a:pPr>
             <a:r>
-              <a:rPr sz="1400" b="1">
+              <a:rPr sz="1600" b="1">
                 <a:solidFill>
                   <a:srgbClr val="083C63"/>
                 </a:solidFill>
@@ -11498,8 +11683,8 @@
         </p:nvSpPr>
         <p:spPr>
           <a:xfrm>
-            <a:off x="640080" y="5596128"/>
-            <a:ext cx="10972800" cy="329184"/>
+            <a:off x="640080" y="5788152"/>
+            <a:ext cx="6309360" cy="502920"/>
           </a:xfrm>
           <a:prstGeom prst="rect">
             <a:avLst/>
@@ -11514,11 +11699,11 @@
           <a:p>
             <a:pPr algn="l">
               <a:lnSpc>
-                <a:spcPct val="100000"/>
-              </a:lnSpc>
-            </a:pPr>
-            <a:r>
-              <a:rPr sz="1200" b="0">
+                <a:spcPct val="130000"/>
+              </a:lnSpc>
+            </a:pPr>
+            <a:r>
+              <a:rPr sz="1400" b="0">
                 <a:solidFill>
                   <a:srgbClr val="595959"/>
                 </a:solidFill>
@@ -11538,8 +11723,8 @@
         </p:nvCxnSpPr>
         <p:spPr>
           <a:xfrm>
-            <a:off x="640080" y="6016752"/>
-            <a:ext cx="10972800" cy="0"/>
+            <a:off x="640080" y="6281928"/>
+            <a:ext cx="6309360" cy="0"/>
           </a:xfrm>
           <a:prstGeom prst="line">
             <a:avLst/>
@@ -11573,8 +11758,8 @@
         </p:nvSpPr>
         <p:spPr>
           <a:xfrm>
-            <a:off x="640080" y="6172200"/>
-            <a:ext cx="8229600" cy="457200"/>
+            <a:off x="640080" y="6373368"/>
+            <a:ext cx="6309360" cy="822960"/>
           </a:xfrm>
           <a:prstGeom prst="rect">
             <a:avLst/>
@@ -11589,25 +11774,261 @@
           <a:p>
             <a:pPr algn="l">
               <a:lnSpc>
+                <a:spcPct val="140000"/>
+              </a:lnSpc>
+            </a:pPr>
+            <a:r>
+              <a:rPr sz="1400" b="0">
+                <a:solidFill>
+                  <a:srgbClr val="595959"/>
+                </a:solidFill>
+                <a:latin typeface="Times New Roman"/>
+                <a:ea typeface="宋体"/>
+              </a:rPr>
+              <a:t>周期分类：间隔 &gt; 计划性停机阈值 → 计划性停机；&gt; 正常周期阈值 → 异常周期；其余为正常周期。</a:t>
+            </a:r>
+          </a:p>
+        </p:txBody>
+      </p:sp>
+      <p:sp>
+        <p:nvSpPr>
+          <p:cNvPr id="21" name="Rectangle 20"/>
+          <p:cNvSpPr/>
+          <p:nvPr/>
+        </p:nvSpPr>
+        <p:spPr>
+          <a:xfrm>
+            <a:off x="7315200" y="1554480"/>
+            <a:ext cx="4297680" cy="4480560"/>
+          </a:xfrm>
+          <a:prstGeom prst="rect">
+            <a:avLst/>
+          </a:prstGeom>
+          <a:solidFill>
+            <a:srgbClr val="FBF2DA"/>
+          </a:solidFill>
+          <a:ln w="9525">
+            <a:solidFill>
+              <a:srgbClr val="FFFFFF"/>
+            </a:solidFill>
+          </a:ln>
+          <a:effectLst/>
+        </p:spPr>
+        <p:style>
+          <a:lnRef idx="1">
+            <a:schemeClr val="accent1"/>
+          </a:lnRef>
+          <a:fillRef idx="3">
+            <a:schemeClr val="accent1"/>
+          </a:fillRef>
+          <a:effectRef idx="2">
+            <a:schemeClr val="accent1"/>
+          </a:effectRef>
+          <a:fontRef idx="minor">
+            <a:schemeClr val="lt1"/>
+          </a:fontRef>
+        </p:style>
+        <p:txBody>
+          <a:bodyPr rtlCol="0" anchor="t" wrap="square" lIns="182880" rIns="182880" tIns="54864" bIns="54864"/>
+          <a:lstStyle/>
+          <a:p>
+            <a:pPr algn="l">
+              <a:lnSpc>
                 <a:spcPct val="100000"/>
               </a:lnSpc>
             </a:pPr>
             <a:r>
-              <a:rPr sz="1200" b="0">
-                <a:solidFill>
-                  <a:srgbClr val="595959"/>
-                </a:solidFill>
-                <a:latin typeface="Times New Roman"/>
-                <a:ea typeface="宋体"/>
-              </a:rPr>
-              <a:t>周期分类：间隔 &gt; 计划性停机阈值 → 计划性停机；&gt; 正常周期阈值 → 异常周期；其余为正常周期。</a:t>
-            </a:r>
-          </a:p>
-        </p:txBody>
-      </p:sp>
-      <p:sp>
-        <p:nvSpPr>
-          <p:cNvPr id="21" name="TextBox 20"/>
+              <a:rPr sz="1600" b="1">
+                <a:solidFill>
+                  <a:srgbClr val="2E3B4E"/>
+                </a:solidFill>
+                <a:latin typeface="Times New Roman"/>
+                <a:ea typeface="宋体"/>
+              </a:rPr>
+              <a:t>换盘时间分摊示例（LM）</a:t>
+            </a:r>
+          </a:p>
+        </p:txBody>
+      </p:sp>
+      <p:sp>
+        <p:nvSpPr>
+          <p:cNvPr id="22" name="TextBox 21"/>
+          <p:cNvSpPr txBox="1"/>
+          <p:nvPr/>
+        </p:nvSpPr>
+        <p:spPr>
+          <a:xfrm>
+            <a:off x="7589520" y="2331720"/>
+            <a:ext cx="3794760" cy="3474720"/>
+          </a:xfrm>
+          <a:prstGeom prst="rect">
+            <a:avLst/>
+          </a:prstGeom>
+          <a:noFill/>
+        </p:spPr>
+        <p:txBody>
+          <a:bodyPr wrap="square" anchor="t" lIns="0" rIns="0" tIns="0" bIns="0">
+            <a:spAutoFit/>
+          </a:bodyPr>
+          <a:lstStyle/>
+          <a:p>
+            <a:pPr algn="l">
+              <a:lnSpc>
+                <a:spcPct val="135000"/>
+              </a:lnSpc>
+            </a:pPr>
+            <a:r>
+              <a:rPr sz="1400" b="0">
+                <a:solidFill>
+                  <a:srgbClr val="525F6F"/>
+                </a:solidFill>
+                <a:latin typeface="Times New Roman"/>
+                <a:ea typeface="宋体"/>
+              </a:rPr>
+              <a:t>单次换盘（下料 → 新盘上料）：</a:t>
+            </a:r>
+          </a:p>
+          <a:p>
+            <a:pPr algn="l">
+              <a:lnSpc>
+                <a:spcPct val="135000"/>
+              </a:lnSpc>
+            </a:pPr>
+            <a:r>
+              <a:rPr sz="1400" b="0">
+                <a:solidFill>
+                  <a:srgbClr val="525F6F"/>
+                </a:solidFill>
+                <a:latin typeface="Times New Roman"/>
+                <a:ea typeface="宋体"/>
+              </a:rPr>
+              <a:t>15.46 秒</a:t>
+            </a:r>
+          </a:p>
+          <a:p>
+            <a:pPr algn="l">
+              <a:lnSpc>
+                <a:spcPct val="135000"/>
+              </a:lnSpc>
+            </a:pPr>
+            <a:r>
+              <a:rPr sz="1400" b="0">
+                <a:solidFill>
+                  <a:srgbClr val="525F6F"/>
+                </a:solidFill>
+                <a:latin typeface="Times New Roman"/>
+                <a:ea typeface="宋体"/>
+              </a:rPr>
+              <a:t/>
+            </a:r>
+          </a:p>
+          <a:p>
+            <a:pPr algn="l">
+              <a:lnSpc>
+                <a:spcPct val="135000"/>
+              </a:lnSpc>
+            </a:pPr>
+            <a:r>
+              <a:rPr sz="1400" b="0">
+                <a:solidFill>
+                  <a:srgbClr val="525F6F"/>
+                </a:solidFill>
+                <a:latin typeface="Times New Roman"/>
+                <a:ea typeface="宋体"/>
+              </a:rPr>
+              <a:t>每盘颗数：24 颗</a:t>
+            </a:r>
+          </a:p>
+          <a:p>
+            <a:pPr algn="l">
+              <a:lnSpc>
+                <a:spcPct val="135000"/>
+              </a:lnSpc>
+            </a:pPr>
+            <a:r>
+              <a:rPr sz="1400" b="0">
+                <a:solidFill>
+                  <a:srgbClr val="525F6F"/>
+                </a:solidFill>
+                <a:latin typeface="Times New Roman"/>
+                <a:ea typeface="宋体"/>
+              </a:rPr>
+              <a:t>每颗换盘开销：</a:t>
+            </a:r>
+          </a:p>
+          <a:p>
+            <a:pPr algn="l">
+              <a:lnSpc>
+                <a:spcPct val="135000"/>
+              </a:lnSpc>
+            </a:pPr>
+            <a:r>
+              <a:rPr sz="1400" b="0">
+                <a:solidFill>
+                  <a:srgbClr val="525F6F"/>
+                </a:solidFill>
+                <a:latin typeface="Times New Roman"/>
+                <a:ea typeface="宋体"/>
+              </a:rPr>
+              <a:t>15.46 ÷ 24 ≈ 0.64 秒</a:t>
+            </a:r>
+          </a:p>
+          <a:p>
+            <a:pPr algn="l">
+              <a:lnSpc>
+                <a:spcPct val="135000"/>
+              </a:lnSpc>
+            </a:pPr>
+            <a:r>
+              <a:rPr sz="1400" b="0">
+                <a:solidFill>
+                  <a:srgbClr val="525F6F"/>
+                </a:solidFill>
+                <a:latin typeface="Times New Roman"/>
+                <a:ea typeface="宋体"/>
+              </a:rPr>
+              <a:t/>
+            </a:r>
+          </a:p>
+          <a:p>
+            <a:pPr algn="l">
+              <a:lnSpc>
+                <a:spcPct val="135000"/>
+              </a:lnSpc>
+            </a:pPr>
+            <a:r>
+              <a:rPr sz="1400" b="0">
+                <a:solidFill>
+                  <a:srgbClr val="525F6F"/>
+                </a:solidFill>
+                <a:latin typeface="Times New Roman"/>
+                <a:ea typeface="宋体"/>
+              </a:rPr>
+              <a:t>有效周期 = 1.65 + 0.64 ≈ 2.29 秒</a:t>
+            </a:r>
+          </a:p>
+          <a:p>
+            <a:pPr algn="l">
+              <a:lnSpc>
+                <a:spcPct val="135000"/>
+              </a:lnSpc>
+            </a:pPr>
+            <a:r>
+              <a:rPr sz="1400" b="0">
+                <a:solidFill>
+                  <a:srgbClr val="525F6F"/>
+                </a:solidFill>
+                <a:latin typeface="Times New Roman"/>
+                <a:ea typeface="宋体"/>
+              </a:rPr>
+              <a:t>Pure UPH ≈ 1570 / 小时</a:t>
+            </a:r>
+          </a:p>
+        </p:txBody>
+      </p:sp>
+      <p:sp>
+        <p:nvSpPr>
+          <p:cNvPr id="23" name="TextBox 22"/>
           <p:cNvSpPr txBox="1"/>
           <p:nvPr/>
         </p:nvSpPr>
@@ -11777,7 +12198,7 @@
               </a:lnSpc>
             </a:pPr>
             <a:r>
-              <a:rPr sz="1400" b="1">
+              <a:rPr sz="1600" b="1">
                 <a:solidFill>
                   <a:srgbClr val="083C63"/>
                 </a:solidFill>
@@ -11813,11 +12234,11 @@
           <a:p>
             <a:pPr algn="l">
               <a:lnSpc>
-                <a:spcPct val="135000"/>
-              </a:lnSpc>
-            </a:pPr>
-            <a:r>
-              <a:rPr sz="1200" b="0">
+                <a:spcPct val="140000"/>
+              </a:lnSpc>
+            </a:pPr>
+            <a:r>
+              <a:rPr sz="1400" b="0">
                 <a:solidFill>
                   <a:srgbClr val="595959"/>
                 </a:solidFill>
@@ -11830,11 +12251,11 @@
           <a:p>
             <a:pPr algn="l">
               <a:lnSpc>
-                <a:spcPct val="135000"/>
-              </a:lnSpc>
-            </a:pPr>
-            <a:r>
-              <a:rPr sz="1200" b="0">
+                <a:spcPct val="140000"/>
+              </a:lnSpc>
+            </a:pPr>
+            <a:r>
+              <a:rPr sz="1400" b="0">
                 <a:solidFill>
                   <a:srgbClr val="595959"/>
                 </a:solidFill>
@@ -11847,11 +12268,11 @@
           <a:p>
             <a:pPr algn="l">
               <a:lnSpc>
-                <a:spcPct val="135000"/>
-              </a:lnSpc>
-            </a:pPr>
-            <a:r>
-              <a:rPr sz="1200" b="0">
+                <a:spcPct val="140000"/>
+              </a:lnSpc>
+            </a:pPr>
+            <a:r>
+              <a:rPr sz="1400" b="0">
                 <a:solidFill>
                   <a:srgbClr val="595959"/>
                 </a:solidFill>
@@ -11864,11 +12285,11 @@
           <a:p>
             <a:pPr algn="l">
               <a:lnSpc>
-                <a:spcPct val="135000"/>
-              </a:lnSpc>
-            </a:pPr>
-            <a:r>
-              <a:rPr sz="1200" b="0">
+                <a:spcPct val="140000"/>
+              </a:lnSpc>
+            </a:pPr>
+            <a:r>
+              <a:rPr sz="1400" b="0">
                 <a:solidFill>
                   <a:srgbClr val="595959"/>
                 </a:solidFill>
@@ -11881,11 +12302,11 @@
           <a:p>
             <a:pPr algn="l">
               <a:lnSpc>
-                <a:spcPct val="135000"/>
-              </a:lnSpc>
-            </a:pPr>
-            <a:r>
-              <a:rPr sz="1200" b="0">
+                <a:spcPct val="140000"/>
+              </a:lnSpc>
+            </a:pPr>
+            <a:r>
+              <a:rPr sz="1400" b="0">
                 <a:solidFill>
                   <a:srgbClr val="595959"/>
                 </a:solidFill>
@@ -11898,11 +12319,11 @@
           <a:p>
             <a:pPr algn="l">
               <a:lnSpc>
-                <a:spcPct val="135000"/>
-              </a:lnSpc>
-            </a:pPr>
-            <a:r>
-              <a:rPr sz="1200" b="0">
+                <a:spcPct val="140000"/>
+              </a:lnSpc>
+            </a:pPr>
+            <a:r>
+              <a:rPr sz="1400" b="0">
                 <a:solidFill>
                   <a:srgbClr val="595959"/>
                 </a:solidFill>
@@ -11915,11 +12336,11 @@
           <a:p>
             <a:pPr algn="l">
               <a:lnSpc>
-                <a:spcPct val="135000"/>
-              </a:lnSpc>
-            </a:pPr>
-            <a:r>
-              <a:rPr sz="1200" b="0">
+                <a:spcPct val="140000"/>
+              </a:lnSpc>
+            </a:pPr>
+            <a:r>
+              <a:rPr sz="1400" b="0">
                 <a:solidFill>
                   <a:srgbClr val="595959"/>
                 </a:solidFill>
@@ -11955,11 +12376,11 @@
           <a:p>
             <a:pPr algn="l">
               <a:lnSpc>
-                <a:spcPct val="135000"/>
-              </a:lnSpc>
-            </a:pPr>
-            <a:r>
-              <a:rPr sz="1200" b="0">
+                <a:spcPct val="140000"/>
+              </a:lnSpc>
+            </a:pPr>
+            <a:r>
+              <a:rPr sz="1400" b="0">
                 <a:solidFill>
                   <a:srgbClr val="595959"/>
                 </a:solidFill>

--- a/docs/usage_deck/final/机台log分析使用说明.pptx
+++ b/docs/usage_deck/final/机台log分析使用说明.pptx
@@ -5325,7 +5325,7 @@
           </a:fontRef>
         </p:style>
         <p:txBody>
-          <a:bodyPr rtlCol="0" anchor="t" wrap="square" lIns="128016" rIns="128016" tIns="54864" bIns="54864"/>
+          <a:bodyPr rtlCol="0" anchor="t" wrap="square" lIns="603504" rIns="128016" tIns="54864" bIns="54864"/>
           <a:lstStyle/>
           <a:p>
             <a:pPr algn="l">
@@ -5366,9 +5366,33 @@
           </a:p>
         </p:txBody>
       </p:sp>
-      <p:sp>
-        <p:nvSpPr>
-          <p:cNvPr id="6" name="Rectangle 5"/>
+      <p:pic>
+        <p:nvPicPr>
+          <p:cNvPr id="6" name="Picture 5" descr="percent.png"/>
+          <p:cNvPicPr>
+            <a:picLocks noChangeAspect="1"/>
+          </p:cNvPicPr>
+          <p:nvPr/>
+        </p:nvPicPr>
+        <p:blipFill>
+          <a:blip r:embed="rId2"/>
+          <a:stretch>
+            <a:fillRect/>
+          </a:stretch>
+        </p:blipFill>
+        <p:spPr>
+          <a:xfrm>
+            <a:off x="768096" y="1728216"/>
+            <a:ext cx="402336" cy="402336"/>
+          </a:xfrm>
+          <a:prstGeom prst="rect">
+            <a:avLst/>
+          </a:prstGeom>
+        </p:spPr>
+      </p:pic>
+      <p:sp>
+        <p:nvSpPr>
+          <p:cNvPr id="7" name="Rectangle 6"/>
           <p:cNvSpPr/>
           <p:nvPr/>
         </p:nvSpPr>
@@ -5405,7 +5429,7 @@
           </a:fontRef>
         </p:style>
         <p:txBody>
-          <a:bodyPr rtlCol="0" anchor="t" wrap="square" lIns="128016" rIns="128016" tIns="54864" bIns="54864"/>
+          <a:bodyPr rtlCol="0" anchor="t" wrap="square" lIns="603504" rIns="128016" tIns="54864" bIns="54864"/>
           <a:lstStyle/>
           <a:p>
             <a:pPr algn="l">
@@ -5446,9 +5470,33 @@
           </a:p>
         </p:txBody>
       </p:sp>
-      <p:sp>
-        <p:nvSpPr>
-          <p:cNvPr id="7" name="Rectangle 6"/>
+      <p:pic>
+        <p:nvPicPr>
+          <p:cNvPr id="8" name="Picture 7" descr="pulse.png"/>
+          <p:cNvPicPr>
+            <a:picLocks noChangeAspect="1"/>
+          </p:cNvPicPr>
+          <p:nvPr/>
+        </p:nvPicPr>
+        <p:blipFill>
+          <a:blip r:embed="rId3"/>
+          <a:stretch>
+            <a:fillRect/>
+          </a:stretch>
+        </p:blipFill>
+        <p:spPr>
+          <a:xfrm>
+            <a:off x="4462272" y="1728216"/>
+            <a:ext cx="402336" cy="402336"/>
+          </a:xfrm>
+          <a:prstGeom prst="rect">
+            <a:avLst/>
+          </a:prstGeom>
+        </p:spPr>
+      </p:pic>
+      <p:sp>
+        <p:nvSpPr>
+          <p:cNvPr id="9" name="Rectangle 8"/>
           <p:cNvSpPr/>
           <p:nvPr/>
         </p:nvSpPr>
@@ -5485,7 +5533,7 @@
           </a:fontRef>
         </p:style>
         <p:txBody>
-          <a:bodyPr rtlCol="0" anchor="t" wrap="square" lIns="128016" rIns="128016" tIns="54864" bIns="54864"/>
+          <a:bodyPr rtlCol="0" anchor="t" wrap="square" lIns="603504" rIns="128016" tIns="54864" bIns="54864"/>
           <a:lstStyle/>
           <a:p>
             <a:pPr algn="l">
@@ -5526,9 +5574,33 @@
           </a:p>
         </p:txBody>
       </p:sp>
-      <p:sp>
-        <p:nvSpPr>
-          <p:cNvPr id="8" name="TextBox 7"/>
+      <p:pic>
+        <p:nvPicPr>
+          <p:cNvPr id="10" name="Picture 9" descr="alert.png"/>
+          <p:cNvPicPr>
+            <a:picLocks noChangeAspect="1"/>
+          </p:cNvPicPr>
+          <p:nvPr/>
+        </p:nvPicPr>
+        <p:blipFill>
+          <a:blip r:embed="rId4"/>
+          <a:stretch>
+            <a:fillRect/>
+          </a:stretch>
+        </p:blipFill>
+        <p:spPr>
+          <a:xfrm>
+            <a:off x="8156448" y="1728216"/>
+            <a:ext cx="402336" cy="402336"/>
+          </a:xfrm>
+          <a:prstGeom prst="rect">
+            <a:avLst/>
+          </a:prstGeom>
+        </p:spPr>
+      </p:pic>
+      <p:sp>
+        <p:nvSpPr>
+          <p:cNvPr id="11" name="TextBox 10"/>
           <p:cNvSpPr txBox="1"/>
           <p:nvPr/>
         </p:nvSpPr>
@@ -5619,7 +5691,7 @@
       </p:sp>
       <p:sp>
         <p:nvSpPr>
-          <p:cNvPr id="9" name="TextBox 8"/>
+          <p:cNvPr id="12" name="TextBox 11"/>
           <p:cNvSpPr txBox="1"/>
           <p:nvPr/>
         </p:nvSpPr>
@@ -6394,7 +6466,7 @@
           </a:fontRef>
         </p:style>
         <p:txBody>
-          <a:bodyPr rtlCol="0" anchor="t" wrap="square" lIns="128016" rIns="128016" tIns="54864" bIns="54864"/>
+          <a:bodyPr rtlCol="0" anchor="t" wrap="square" lIns="603504" rIns="128016" tIns="54864" bIns="54864"/>
           <a:lstStyle/>
           <a:p>
             <a:pPr algn="l">
@@ -6435,9 +6507,33 @@
           </a:p>
         </p:txBody>
       </p:sp>
-      <p:sp>
-        <p:nvSpPr>
-          <p:cNvPr id="6" name="Rectangle 5"/>
+      <p:pic>
+        <p:nvPicPr>
+          <p:cNvPr id="6" name="Picture 5" descr="shield.png"/>
+          <p:cNvPicPr>
+            <a:picLocks noChangeAspect="1"/>
+          </p:cNvPicPr>
+          <p:nvPr/>
+        </p:nvPicPr>
+        <p:blipFill>
+          <a:blip r:embed="rId2"/>
+          <a:stretch>
+            <a:fillRect/>
+          </a:stretch>
+        </p:blipFill>
+        <p:spPr>
+          <a:xfrm>
+            <a:off x="768096" y="1728216"/>
+            <a:ext cx="402336" cy="402336"/>
+          </a:xfrm>
+          <a:prstGeom prst="rect">
+            <a:avLst/>
+          </a:prstGeom>
+        </p:spPr>
+      </p:pic>
+      <p:sp>
+        <p:nvSpPr>
+          <p:cNvPr id="7" name="Rectangle 6"/>
           <p:cNvSpPr/>
           <p:nvPr/>
         </p:nvSpPr>
@@ -6474,7 +6570,7 @@
           </a:fontRef>
         </p:style>
         <p:txBody>
-          <a:bodyPr rtlCol="0" anchor="t" wrap="square" lIns="128016" rIns="128016" tIns="54864" bIns="54864"/>
+          <a:bodyPr rtlCol="0" anchor="t" wrap="square" lIns="603504" rIns="128016" tIns="54864" bIns="54864"/>
           <a:lstStyle/>
           <a:p>
             <a:pPr algn="l">
@@ -6515,9 +6611,33 @@
           </a:p>
         </p:txBody>
       </p:sp>
-      <p:sp>
-        <p:nvSpPr>
-          <p:cNvPr id="7" name="Rectangle 6"/>
+      <p:pic>
+        <p:nvPicPr>
+          <p:cNvPr id="8" name="Picture 7" descr="folder.png"/>
+          <p:cNvPicPr>
+            <a:picLocks noChangeAspect="1"/>
+          </p:cNvPicPr>
+          <p:nvPr/>
+        </p:nvPicPr>
+        <p:blipFill>
+          <a:blip r:embed="rId3"/>
+          <a:stretch>
+            <a:fillRect/>
+          </a:stretch>
+        </p:blipFill>
+        <p:spPr>
+          <a:xfrm>
+            <a:off x="6336792" y="1728216"/>
+            <a:ext cx="402336" cy="402336"/>
+          </a:xfrm>
+          <a:prstGeom prst="rect">
+            <a:avLst/>
+          </a:prstGeom>
+        </p:spPr>
+      </p:pic>
+      <p:sp>
+        <p:nvSpPr>
+          <p:cNvPr id="9" name="Rectangle 8"/>
           <p:cNvSpPr/>
           <p:nvPr/>
         </p:nvSpPr>
@@ -6554,7 +6674,7 @@
           </a:fontRef>
         </p:style>
         <p:txBody>
-          <a:bodyPr rtlCol="0" anchor="t" wrap="square" lIns="128016" rIns="128016" tIns="54864" bIns="54864"/>
+          <a:bodyPr rtlCol="0" anchor="t" wrap="square" lIns="603504" rIns="128016" tIns="54864" bIns="54864"/>
           <a:lstStyle/>
           <a:p>
             <a:pPr algn="l">
@@ -6595,9 +6715,33 @@
           </a:p>
         </p:txBody>
       </p:sp>
-      <p:sp>
-        <p:nvSpPr>
-          <p:cNvPr id="8" name="Rectangle 7"/>
+      <p:pic>
+        <p:nvPicPr>
+          <p:cNvPr id="10" name="Picture 9" descr="ppt.png"/>
+          <p:cNvPicPr>
+            <a:picLocks noChangeAspect="1"/>
+          </p:cNvPicPr>
+          <p:nvPr/>
+        </p:nvPicPr>
+        <p:blipFill>
+          <a:blip r:embed="rId4"/>
+          <a:stretch>
+            <a:fillRect/>
+          </a:stretch>
+        </p:blipFill>
+        <p:spPr>
+          <a:xfrm>
+            <a:off x="768096" y="4151376"/>
+            <a:ext cx="402336" cy="402336"/>
+          </a:xfrm>
+          <a:prstGeom prst="rect">
+            <a:avLst/>
+          </a:prstGeom>
+        </p:spPr>
+      </p:pic>
+      <p:sp>
+        <p:nvSpPr>
+          <p:cNvPr id="11" name="Rectangle 10"/>
           <p:cNvSpPr/>
           <p:nvPr/>
         </p:nvSpPr>
@@ -6634,7 +6778,7 @@
           </a:fontRef>
         </p:style>
         <p:txBody>
-          <a:bodyPr rtlCol="0" anchor="t" wrap="square" lIns="128016" rIns="128016" tIns="54864" bIns="54864"/>
+          <a:bodyPr rtlCol="0" anchor="t" wrap="square" lIns="603504" rIns="128016" tIns="54864" bIns="54864"/>
           <a:lstStyle/>
           <a:p>
             <a:pPr algn="l">
@@ -6675,9 +6819,33 @@
           </a:p>
         </p:txBody>
       </p:sp>
-      <p:sp>
-        <p:nvSpPr>
-          <p:cNvPr id="9" name="TextBox 8"/>
+      <p:pic>
+        <p:nvPicPr>
+          <p:cNvPr id="12" name="Picture 11" descr="settings.png"/>
+          <p:cNvPicPr>
+            <a:picLocks noChangeAspect="1"/>
+          </p:cNvPicPr>
+          <p:nvPr/>
+        </p:nvPicPr>
+        <p:blipFill>
+          <a:blip r:embed="rId5"/>
+          <a:stretch>
+            <a:fillRect/>
+          </a:stretch>
+        </p:blipFill>
+        <p:spPr>
+          <a:xfrm>
+            <a:off x="6336792" y="4151376"/>
+            <a:ext cx="402336" cy="402336"/>
+          </a:xfrm>
+          <a:prstGeom prst="rect">
+            <a:avLst/>
+          </a:prstGeom>
+        </p:spPr>
+      </p:pic>
+      <p:sp>
+        <p:nvSpPr>
+          <p:cNvPr id="13" name="TextBox 12"/>
           <p:cNvSpPr txBox="1"/>
           <p:nvPr/>
         </p:nvSpPr>
@@ -7267,7 +7435,7 @@
           </a:fontRef>
         </p:style>
         <p:txBody>
-          <a:bodyPr rtlCol="0" anchor="t" wrap="square" lIns="128016" rIns="128016" tIns="54864" bIns="54864"/>
+          <a:bodyPr rtlCol="0" anchor="t" wrap="square" lIns="603504" rIns="128016" tIns="54864" bIns="54864"/>
           <a:lstStyle/>
           <a:p>
             <a:pPr algn="l">
@@ -7308,9 +7476,33 @@
           </a:p>
         </p:txBody>
       </p:sp>
-      <p:sp>
-        <p:nvSpPr>
-          <p:cNvPr id="6" name="Rectangle 5"/>
+      <p:pic>
+        <p:nvPicPr>
+          <p:cNvPr id="6" name="Picture 5" descr="file.png"/>
+          <p:cNvPicPr>
+            <a:picLocks noChangeAspect="1"/>
+          </p:cNvPicPr>
+          <p:nvPr/>
+        </p:nvPicPr>
+        <p:blipFill>
+          <a:blip r:embed="rId2"/>
+          <a:stretch>
+            <a:fillRect/>
+          </a:stretch>
+        </p:blipFill>
+        <p:spPr>
+          <a:xfrm>
+            <a:off x="768096" y="1728216"/>
+            <a:ext cx="402336" cy="402336"/>
+          </a:xfrm>
+          <a:prstGeom prst="rect">
+            <a:avLst/>
+          </a:prstGeom>
+        </p:spPr>
+      </p:pic>
+      <p:sp>
+        <p:nvSpPr>
+          <p:cNvPr id="7" name="Rectangle 6"/>
           <p:cNvSpPr/>
           <p:nvPr/>
         </p:nvSpPr>
@@ -7347,7 +7539,7 @@
           </a:fontRef>
         </p:style>
         <p:txBody>
-          <a:bodyPr rtlCol="0" anchor="t" wrap="square" lIns="128016" rIns="128016" tIns="54864" bIns="54864"/>
+          <a:bodyPr rtlCol="0" anchor="t" wrap="square" lIns="603504" rIns="128016" tIns="54864" bIns="54864"/>
           <a:lstStyle/>
           <a:p>
             <a:pPr algn="l">
@@ -7388,9 +7580,33 @@
           </a:p>
         </p:txBody>
       </p:sp>
-      <p:sp>
-        <p:nvSpPr>
-          <p:cNvPr id="7" name="Rectangle 6"/>
+      <p:pic>
+        <p:nvPicPr>
+          <p:cNvPr id="8" name="Picture 7" descr="chart.png"/>
+          <p:cNvPicPr>
+            <a:picLocks noChangeAspect="1"/>
+          </p:cNvPicPr>
+          <p:nvPr/>
+        </p:nvPicPr>
+        <p:blipFill>
+          <a:blip r:embed="rId3"/>
+          <a:stretch>
+            <a:fillRect/>
+          </a:stretch>
+        </p:blipFill>
+        <p:spPr>
+          <a:xfrm>
+            <a:off x="4462272" y="1728216"/>
+            <a:ext cx="402336" cy="402336"/>
+          </a:xfrm>
+          <a:prstGeom prst="rect">
+            <a:avLst/>
+          </a:prstGeom>
+        </p:spPr>
+      </p:pic>
+      <p:sp>
+        <p:nvSpPr>
+          <p:cNvPr id="9" name="Rectangle 8"/>
           <p:cNvSpPr/>
           <p:nvPr/>
         </p:nvSpPr>
@@ -7427,7 +7643,7 @@
           </a:fontRef>
         </p:style>
         <p:txBody>
-          <a:bodyPr rtlCol="0" anchor="t" wrap="square" lIns="128016" rIns="128016" tIns="54864" bIns="54864"/>
+          <a:bodyPr rtlCol="0" anchor="t" wrap="square" lIns="603504" rIns="128016" tIns="54864" bIns="54864"/>
           <a:lstStyle/>
           <a:p>
             <a:pPr algn="l">
@@ -7468,9 +7684,33 @@
           </a:p>
         </p:txBody>
       </p:sp>
-      <p:sp>
-        <p:nvSpPr>
-          <p:cNvPr id="8" name="Rectangle 7"/>
+      <p:pic>
+        <p:nvPicPr>
+          <p:cNvPr id="10" name="Picture 9" descr="percent.png"/>
+          <p:cNvPicPr>
+            <a:picLocks noChangeAspect="1"/>
+          </p:cNvPicPr>
+          <p:nvPr/>
+        </p:nvPicPr>
+        <p:blipFill>
+          <a:blip r:embed="rId4"/>
+          <a:stretch>
+            <a:fillRect/>
+          </a:stretch>
+        </p:blipFill>
+        <p:spPr>
+          <a:xfrm>
+            <a:off x="8156448" y="1728216"/>
+            <a:ext cx="402336" cy="402336"/>
+          </a:xfrm>
+          <a:prstGeom prst="rect">
+            <a:avLst/>
+          </a:prstGeom>
+        </p:spPr>
+      </p:pic>
+      <p:sp>
+        <p:nvSpPr>
+          <p:cNvPr id="11" name="Rectangle 10"/>
           <p:cNvSpPr/>
           <p:nvPr/>
         </p:nvSpPr>
@@ -7507,7 +7747,7 @@
           </a:fontRef>
         </p:style>
         <p:txBody>
-          <a:bodyPr rtlCol="0" anchor="t" wrap="square" lIns="128016" rIns="128016" tIns="54864" bIns="54864"/>
+          <a:bodyPr rtlCol="0" anchor="t" wrap="square" lIns="603504" rIns="128016" tIns="54864" bIns="54864"/>
           <a:lstStyle/>
           <a:p>
             <a:pPr algn="l">
@@ -7548,9 +7788,33 @@
           </a:p>
         </p:txBody>
       </p:sp>
-      <p:sp>
-        <p:nvSpPr>
-          <p:cNvPr id="9" name="Rectangle 8"/>
+      <p:pic>
+        <p:nvPicPr>
+          <p:cNvPr id="12" name="Picture 11" descr="alert.png"/>
+          <p:cNvPicPr>
+            <a:picLocks noChangeAspect="1"/>
+          </p:cNvPicPr>
+          <p:nvPr/>
+        </p:nvPicPr>
+        <p:blipFill>
+          <a:blip r:embed="rId5"/>
+          <a:stretch>
+            <a:fillRect/>
+          </a:stretch>
+        </p:blipFill>
+        <p:spPr>
+          <a:xfrm>
+            <a:off x="768096" y="4151376"/>
+            <a:ext cx="402336" cy="402336"/>
+          </a:xfrm>
+          <a:prstGeom prst="rect">
+            <a:avLst/>
+          </a:prstGeom>
+        </p:spPr>
+      </p:pic>
+      <p:sp>
+        <p:nvSpPr>
+          <p:cNvPr id="13" name="Rectangle 12"/>
           <p:cNvSpPr/>
           <p:nvPr/>
         </p:nvSpPr>
@@ -7587,7 +7851,7 @@
           </a:fontRef>
         </p:style>
         <p:txBody>
-          <a:bodyPr rtlCol="0" anchor="t" wrap="square" lIns="128016" rIns="128016" tIns="54864" bIns="54864"/>
+          <a:bodyPr rtlCol="0" anchor="t" wrap="square" lIns="603504" rIns="128016" tIns="54864" bIns="54864"/>
           <a:lstStyle/>
           <a:p>
             <a:pPr algn="l">
@@ -7628,9 +7892,33 @@
           </a:p>
         </p:txBody>
       </p:sp>
-      <p:sp>
-        <p:nvSpPr>
-          <p:cNvPr id="10" name="Rectangle 9"/>
+      <p:pic>
+        <p:nvPicPr>
+          <p:cNvPr id="14" name="Picture 13" descr="pulse.png"/>
+          <p:cNvPicPr>
+            <a:picLocks noChangeAspect="1"/>
+          </p:cNvPicPr>
+          <p:nvPr/>
+        </p:nvPicPr>
+        <p:blipFill>
+          <a:blip r:embed="rId6"/>
+          <a:stretch>
+            <a:fillRect/>
+          </a:stretch>
+        </p:blipFill>
+        <p:spPr>
+          <a:xfrm>
+            <a:off x="4462272" y="4151376"/>
+            <a:ext cx="402336" cy="402336"/>
+          </a:xfrm>
+          <a:prstGeom prst="rect">
+            <a:avLst/>
+          </a:prstGeom>
+        </p:spPr>
+      </p:pic>
+      <p:sp>
+        <p:nvSpPr>
+          <p:cNvPr id="15" name="Rectangle 14"/>
           <p:cNvSpPr/>
           <p:nvPr/>
         </p:nvSpPr>
@@ -7667,7 +7955,7 @@
           </a:fontRef>
         </p:style>
         <p:txBody>
-          <a:bodyPr rtlCol="0" anchor="t" wrap="square" lIns="128016" rIns="128016" tIns="54864" bIns="54864"/>
+          <a:bodyPr rtlCol="0" anchor="t" wrap="square" lIns="603504" rIns="128016" tIns="54864" bIns="54864"/>
           <a:lstStyle/>
           <a:p>
             <a:pPr algn="l">
@@ -7708,9 +7996,33 @@
           </a:p>
         </p:txBody>
       </p:sp>
-      <p:sp>
-        <p:nvSpPr>
-          <p:cNvPr id="11" name="TextBox 10"/>
+      <p:pic>
+        <p:nvPicPr>
+          <p:cNvPr id="16" name="Picture 15" descr="rocket.png"/>
+          <p:cNvPicPr>
+            <a:picLocks noChangeAspect="1"/>
+          </p:cNvPicPr>
+          <p:nvPr/>
+        </p:nvPicPr>
+        <p:blipFill>
+          <a:blip r:embed="rId7"/>
+          <a:stretch>
+            <a:fillRect/>
+          </a:stretch>
+        </p:blipFill>
+        <p:spPr>
+          <a:xfrm>
+            <a:off x="8156448" y="4151376"/>
+            <a:ext cx="402336" cy="402336"/>
+          </a:xfrm>
+          <a:prstGeom prst="rect">
+            <a:avLst/>
+          </a:prstGeom>
+        </p:spPr>
+      </p:pic>
+      <p:sp>
+        <p:nvSpPr>
+          <p:cNvPr id="17" name="TextBox 16"/>
           <p:cNvSpPr txBox="1"/>
           <p:nvPr/>
         </p:nvSpPr>
@@ -7884,7 +8196,7 @@
           </a:fontRef>
         </p:style>
         <p:txBody>
-          <a:bodyPr rtlCol="0" anchor="t" wrap="square" lIns="128016" rIns="128016" tIns="54864" bIns="54864"/>
+          <a:bodyPr rtlCol="0" anchor="t" wrap="square" lIns="603504" rIns="128016" tIns="54864" bIns="54864"/>
           <a:lstStyle/>
           <a:p>
             <a:pPr algn="l">
@@ -7925,9 +8237,33 @@
           </a:p>
         </p:txBody>
       </p:sp>
-      <p:sp>
-        <p:nvSpPr>
-          <p:cNvPr id="6" name="Rectangle 5"/>
+      <p:pic>
+        <p:nvPicPr>
+          <p:cNvPr id="6" name="Picture 5" descr="template.png"/>
+          <p:cNvPicPr>
+            <a:picLocks noChangeAspect="1"/>
+          </p:cNvPicPr>
+          <p:nvPr/>
+        </p:nvPicPr>
+        <p:blipFill>
+          <a:blip r:embed="rId2"/>
+          <a:stretch>
+            <a:fillRect/>
+          </a:stretch>
+        </p:blipFill>
+        <p:spPr>
+          <a:xfrm>
+            <a:off x="768096" y="1728216"/>
+            <a:ext cx="402336" cy="402336"/>
+          </a:xfrm>
+          <a:prstGeom prst="rect">
+            <a:avLst/>
+          </a:prstGeom>
+        </p:spPr>
+      </p:pic>
+      <p:sp>
+        <p:nvSpPr>
+          <p:cNvPr id="7" name="Rectangle 6"/>
           <p:cNvSpPr/>
           <p:nvPr/>
         </p:nvSpPr>
@@ -7964,7 +8300,7 @@
           </a:fontRef>
         </p:style>
         <p:txBody>
-          <a:bodyPr rtlCol="0" anchor="t" wrap="square" lIns="128016" rIns="128016" tIns="54864" bIns="54864"/>
+          <a:bodyPr rtlCol="0" anchor="t" wrap="square" lIns="603504" rIns="128016" tIns="54864" bIns="54864"/>
           <a:lstStyle/>
           <a:p>
             <a:pPr algn="l">
@@ -8005,9 +8341,33 @@
           </a:p>
         </p:txBody>
       </p:sp>
-      <p:sp>
-        <p:nvSpPr>
-          <p:cNvPr id="7" name="Rectangle 6"/>
+      <p:pic>
+        <p:nvPicPr>
+          <p:cNvPr id="8" name="Picture 7" descr="bottleneck.png"/>
+          <p:cNvPicPr>
+            <a:picLocks noChangeAspect="1"/>
+          </p:cNvPicPr>
+          <p:nvPr/>
+        </p:nvPicPr>
+        <p:blipFill>
+          <a:blip r:embed="rId3"/>
+          <a:stretch>
+            <a:fillRect/>
+          </a:stretch>
+        </p:blipFill>
+        <p:spPr>
+          <a:xfrm>
+            <a:off x="4462272" y="1728216"/>
+            <a:ext cx="402336" cy="402336"/>
+          </a:xfrm>
+          <a:prstGeom prst="rect">
+            <a:avLst/>
+          </a:prstGeom>
+        </p:spPr>
+      </p:pic>
+      <p:sp>
+        <p:nvSpPr>
+          <p:cNvPr id="9" name="Rectangle 8"/>
           <p:cNvSpPr/>
           <p:nvPr/>
         </p:nvSpPr>
@@ -8044,7 +8404,7 @@
           </a:fontRef>
         </p:style>
         <p:txBody>
-          <a:bodyPr rtlCol="0" anchor="t" wrap="square" lIns="128016" rIns="128016" tIns="54864" bIns="54864"/>
+          <a:bodyPr rtlCol="0" anchor="t" wrap="square" lIns="603504" rIns="128016" tIns="54864" bIns="54864"/>
           <a:lstStyle/>
           <a:p>
             <a:pPr algn="l">
@@ -8085,9 +8445,33 @@
           </a:p>
         </p:txBody>
       </p:sp>
-      <p:sp>
-        <p:nvSpPr>
-          <p:cNvPr id="8" name="Rectangle 7"/>
+      <p:pic>
+        <p:nvPicPr>
+          <p:cNvPr id="10" name="Picture 9" descr="swap.png"/>
+          <p:cNvPicPr>
+            <a:picLocks noChangeAspect="1"/>
+          </p:cNvPicPr>
+          <p:nvPr/>
+        </p:nvPicPr>
+        <p:blipFill>
+          <a:blip r:embed="rId4"/>
+          <a:stretch>
+            <a:fillRect/>
+          </a:stretch>
+        </p:blipFill>
+        <p:spPr>
+          <a:xfrm>
+            <a:off x="8156448" y="1728216"/>
+            <a:ext cx="402336" cy="402336"/>
+          </a:xfrm>
+          <a:prstGeom prst="rect">
+            <a:avLst/>
+          </a:prstGeom>
+        </p:spPr>
+      </p:pic>
+      <p:sp>
+        <p:nvSpPr>
+          <p:cNvPr id="11" name="Rectangle 10"/>
           <p:cNvSpPr/>
           <p:nvPr/>
         </p:nvSpPr>
@@ -8124,7 +8508,7 @@
           </a:fontRef>
         </p:style>
         <p:txBody>
-          <a:bodyPr rtlCol="0" anchor="t" wrap="square" lIns="128016" rIns="128016" tIns="54864" bIns="54864"/>
+          <a:bodyPr rtlCol="0" anchor="t" wrap="square" lIns="603504" rIns="128016" tIns="54864" bIns="54864"/>
           <a:lstStyle/>
           <a:p>
             <a:pPr algn="l">
@@ -8165,9 +8549,33 @@
           </a:p>
         </p:txBody>
       </p:sp>
-      <p:sp>
-        <p:nvSpPr>
-          <p:cNvPr id="9" name="Rectangle 8"/>
+      <p:pic>
+        <p:nvPicPr>
+          <p:cNvPr id="12" name="Picture 11" descr="gantt.png"/>
+          <p:cNvPicPr>
+            <a:picLocks noChangeAspect="1"/>
+          </p:cNvPicPr>
+          <p:nvPr/>
+        </p:nvPicPr>
+        <p:blipFill>
+          <a:blip r:embed="rId5"/>
+          <a:stretch>
+            <a:fillRect/>
+          </a:stretch>
+        </p:blipFill>
+        <p:spPr>
+          <a:xfrm>
+            <a:off x="768096" y="4151376"/>
+            <a:ext cx="402336" cy="402336"/>
+          </a:xfrm>
+          <a:prstGeom prst="rect">
+            <a:avLst/>
+          </a:prstGeom>
+        </p:spPr>
+      </p:pic>
+      <p:sp>
+        <p:nvSpPr>
+          <p:cNvPr id="13" name="Rectangle 12"/>
           <p:cNvSpPr/>
           <p:nvPr/>
         </p:nvSpPr>
@@ -8204,7 +8612,7 @@
           </a:fontRef>
         </p:style>
         <p:txBody>
-          <a:bodyPr rtlCol="0" anchor="t" wrap="square" lIns="128016" rIns="128016" tIns="54864" bIns="54864"/>
+          <a:bodyPr rtlCol="0" anchor="t" wrap="square" lIns="603504" rIns="128016" tIns="54864" bIns="54864"/>
           <a:lstStyle/>
           <a:p>
             <a:pPr algn="l">
@@ -8245,9 +8653,33 @@
           </a:p>
         </p:txBody>
       </p:sp>
-      <p:sp>
-        <p:nvSpPr>
-          <p:cNvPr id="10" name="Rectangle 9"/>
+      <p:pic>
+        <p:nvPicPr>
+          <p:cNvPr id="14" name="Picture 13" descr="mark.png"/>
+          <p:cNvPicPr>
+            <a:picLocks noChangeAspect="1"/>
+          </p:cNvPicPr>
+          <p:nvPr/>
+        </p:nvPicPr>
+        <p:blipFill>
+          <a:blip r:embed="rId6"/>
+          <a:stretch>
+            <a:fillRect/>
+          </a:stretch>
+        </p:blipFill>
+        <p:spPr>
+          <a:xfrm>
+            <a:off x="4462272" y="4151376"/>
+            <a:ext cx="402336" cy="402336"/>
+          </a:xfrm>
+          <a:prstGeom prst="rect">
+            <a:avLst/>
+          </a:prstGeom>
+        </p:spPr>
+      </p:pic>
+      <p:sp>
+        <p:nvSpPr>
+          <p:cNvPr id="15" name="Rectangle 14"/>
           <p:cNvSpPr/>
           <p:nvPr/>
         </p:nvSpPr>
@@ -8284,7 +8716,7 @@
           </a:fontRef>
         </p:style>
         <p:txBody>
-          <a:bodyPr rtlCol="0" anchor="t" wrap="square" lIns="128016" rIns="128016" tIns="54864" bIns="54864"/>
+          <a:bodyPr rtlCol="0" anchor="t" wrap="square" lIns="603504" rIns="128016" tIns="54864" bIns="54864"/>
           <a:lstStyle/>
           <a:p>
             <a:pPr algn="l">
@@ -8325,9 +8757,33 @@
           </a:p>
         </p:txBody>
       </p:sp>
-      <p:sp>
-        <p:nvSpPr>
-          <p:cNvPr id="11" name="TextBox 10"/>
+      <p:pic>
+        <p:nvPicPr>
+          <p:cNvPr id="16" name="Picture 15" descr="report.png"/>
+          <p:cNvPicPr>
+            <a:picLocks noChangeAspect="1"/>
+          </p:cNvPicPr>
+          <p:nvPr/>
+        </p:nvPicPr>
+        <p:blipFill>
+          <a:blip r:embed="rId7"/>
+          <a:stretch>
+            <a:fillRect/>
+          </a:stretch>
+        </p:blipFill>
+        <p:spPr>
+          <a:xfrm>
+            <a:off x="8156448" y="4151376"/>
+            <a:ext cx="402336" cy="402336"/>
+          </a:xfrm>
+          <a:prstGeom prst="rect">
+            <a:avLst/>
+          </a:prstGeom>
+        </p:spPr>
+      </p:pic>
+      <p:sp>
+        <p:nvSpPr>
+          <p:cNvPr id="17" name="TextBox 16"/>
           <p:cNvSpPr txBox="1"/>
           <p:nvPr/>
         </p:nvSpPr>
